--- a/assets/figures-editable/c3-c4/c3-e05.pptx
+++ b/assets/figures-editable/c3-c4/c3-e05.pptx
@@ -3104,8 +3104,8 @@
         </p:nvSpPr>
         <p:spPr>
           <a:xfrm>
-            <a:off x="274320" y="137160"/>
-            <a:ext cx="11612880" cy="365760"/>
+            <a:off x="274320" y="118872"/>
+            <a:ext cx="11612880" cy="340105"/>
           </a:xfrm>
           <a:prstGeom prst="rect">
             <a:avLst/>
@@ -3114,7 +3114,7 @@
           <a:effectLst/>
         </p:spPr>
         <p:txBody>
-          <a:bodyPr wrap="square" lIns="27432" rIns="27432" tIns="18288" bIns="18288" anchor="ctr">
+          <a:bodyPr wrap="none" lIns="18288" rIns="18288" tIns="18288" bIns="18288" anchor="t">
             <a:spAutoFit/>
           </a:bodyPr>
           <a:lstStyle/>
@@ -3125,7 +3125,7 @@
               </a:spcAft>
             </a:pPr>
             <a:r>
-              <a:rPr sz="2100" b="0" i="0">
+              <a:rPr sz="1900" b="1" i="0">
                 <a:solidFill>
                   <a:srgbClr val="8EDBD4"/>
                 </a:solidFill>
@@ -3136,23 +3136,20 @@
           </a:p>
         </p:txBody>
       </p:sp>
-      <p:sp>
-        <p:nvSpPr>
-          <p:cNvPr id="3" name="C3-E05 ellipse 1" descr="sci-ppt:o001"/>
-          <p:cNvSpPr/>
+      <p:cxnSp>
+        <p:nvCxnSpPr>
+          <p:cNvPr id="3" name="C3-E05 line 1" descr="sci-ppt:o001"/>
+          <p:cNvCxnSpPr/>
           <p:nvPr/>
-        </p:nvSpPr>
-        <p:spPr>
-          <a:xfrm>
-            <a:off x="1417319" y="1280160"/>
-            <a:ext cx="1554480" cy="1554480"/>
-          </a:xfrm>
-          <a:prstGeom prst="ellipse">
+        </p:nvCxnSpPr>
+        <p:spPr>
+          <a:xfrm>
+            <a:off x="914400" y="5029200"/>
+            <a:ext cx="5943600" cy="0"/>
+          </a:xfrm>
+          <a:prstGeom prst="line">
             <a:avLst/>
           </a:prstGeom>
-          <a:solidFill>
-            <a:srgbClr val="213E4B"/>
-          </a:solidFill>
           <a:ln w="19050">
             <a:solidFill>
               <a:srgbClr val="B4C7D2"/>
@@ -3160,31 +3157,21 @@
           </a:ln>
           <a:effectLst/>
         </p:spPr>
-        <p:txBody>
-          <a:bodyPr rtlCol="0" anchor="ctr"/>
-          <a:lstStyle/>
-          <a:p>
-            <a:pPr algn="ctr"/>
-          </a:p>
-        </p:txBody>
-      </p:sp>
-      <p:sp>
-        <p:nvSpPr>
-          <p:cNvPr id="4" name="C3-E05 ellipse 2" descr="sci-ppt:o002"/>
-          <p:cNvSpPr/>
+      </p:cxnSp>
+      <p:cxnSp>
+        <p:nvCxnSpPr>
+          <p:cNvPr id="4" name="C3-E05 line 2" descr="sci-ppt:o002"/>
+          <p:cNvCxnSpPr/>
           <p:nvPr/>
-        </p:nvSpPr>
-        <p:spPr>
-          <a:xfrm>
-            <a:off x="7909560" y="1280160"/>
-            <a:ext cx="1554480" cy="1554480"/>
-          </a:xfrm>
-          <a:prstGeom prst="ellipse">
+        </p:nvCxnSpPr>
+        <p:spPr>
+          <a:xfrm>
+            <a:off x="914400" y="1371600"/>
+            <a:ext cx="0" cy="3657600"/>
+          </a:xfrm>
+          <a:prstGeom prst="line">
             <a:avLst/>
           </a:prstGeom>
-          <a:solidFill>
-            <a:srgbClr val="213E4B"/>
-          </a:solidFill>
           <a:ln w="19050">
             <a:solidFill>
               <a:srgbClr val="B4C7D2"/>
@@ -3192,24 +3179,61 @@
           </a:ln>
           <a:effectLst/>
         </p:spPr>
-        <p:txBody>
-          <a:bodyPr rtlCol="0" anchor="ctr"/>
-          <a:lstStyle/>
-          <a:p>
-            <a:pPr algn="ctr"/>
-          </a:p>
-        </p:txBody>
-      </p:sp>
-      <p:sp>
-        <p:nvSpPr>
-          <p:cNvPr id="5" name="C3-E05 text 3" descr="sci-ppt:o003"/>
+      </p:cxnSp>
+      <p:cxnSp>
+        <p:nvCxnSpPr>
+          <p:cNvPr id="5" name="C3-E05 line 3" descr="sci-ppt:o003"/>
+          <p:cNvCxnSpPr/>
+          <p:nvPr/>
+        </p:nvCxnSpPr>
+        <p:spPr>
+          <a:xfrm>
+            <a:off x="914400" y="5029200"/>
+            <a:ext cx="0" cy="64008"/>
+          </a:xfrm>
+          <a:prstGeom prst="line">
+            <a:avLst/>
+          </a:prstGeom>
+          <a:ln w="12700">
+            <a:solidFill>
+              <a:srgbClr val="B4C7D2"/>
+            </a:solidFill>
+          </a:ln>
+          <a:effectLst/>
+        </p:spPr>
+      </p:cxnSp>
+      <p:cxnSp>
+        <p:nvCxnSpPr>
+          <p:cNvPr id="6" name="C3-E05 line 4" descr="sci-ppt:o004"/>
+          <p:cNvCxnSpPr/>
+          <p:nvPr/>
+        </p:nvCxnSpPr>
+        <p:spPr>
+          <a:xfrm>
+            <a:off x="914400" y="1371600"/>
+            <a:ext cx="0" cy="3657600"/>
+          </a:xfrm>
+          <a:prstGeom prst="line">
+            <a:avLst/>
+          </a:prstGeom>
+          <a:ln w="7620">
+            <a:solidFill>
+              <a:srgbClr val="2E4756"/>
+            </a:solidFill>
+          </a:ln>
+          <a:effectLst/>
+        </p:spPr>
+      </p:cxnSp>
+      <p:sp>
+        <p:nvSpPr>
+          <p:cNvPr id="7" name="C3-E05 text 5" descr="sci-ppt:o005"/>
           <p:cNvSpPr txBox="1"/>
           <p:nvPr/>
         </p:nvSpPr>
         <p:spPr>
           <a:xfrm>
-            <a:off x="1645920" y="1874519"/>
-            <a:ext cx="1463040" cy="365760"/>
+            <a:off x="457200" y="5111496"/>
+            <a:ext cx="914400" cy="208407"/>
           </a:xfrm>
           <a:prstGeom prst="rect">
             <a:avLst/>
@@ -3218,7 +3242,613 @@
           <a:effectLst/>
         </p:spPr>
         <p:txBody>
-          <a:bodyPr wrap="square" lIns="27432" rIns="27432" tIns="18288" bIns="18288" anchor="ctr">
+          <a:bodyPr wrap="none" lIns="18288" rIns="18288" tIns="18288" bIns="18288" anchor="t">
+            <a:spAutoFit/>
+          </a:bodyPr>
+          <a:lstStyle/>
+          <a:p>
+            <a:pPr algn="ctr">
+              <a:spcAft>
+                <a:spcPts val="0"/>
+              </a:spcAft>
+            </a:pPr>
+            <a:r>
+              <a:rPr sz="1050" b="0" i="0">
+                <a:solidFill>
+                  <a:srgbClr val="B4C7D2"/>
+                </a:solidFill>
+                <a:latin typeface="Arial"/>
+              </a:rPr>
+              <a:t>0.0</a:t>
+            </a:r>
+          </a:p>
+        </p:txBody>
+      </p:sp>
+      <p:cxnSp>
+        <p:nvCxnSpPr>
+          <p:cNvPr id="8" name="C3-E05 line 6" descr="sci-ppt:o006"/>
+          <p:cNvCxnSpPr/>
+          <p:nvPr/>
+        </p:nvCxnSpPr>
+        <p:spPr>
+          <a:xfrm>
+            <a:off x="2895600" y="5029200"/>
+            <a:ext cx="0" cy="64008"/>
+          </a:xfrm>
+          <a:prstGeom prst="line">
+            <a:avLst/>
+          </a:prstGeom>
+          <a:ln w="12700">
+            <a:solidFill>
+              <a:srgbClr val="B4C7D2"/>
+            </a:solidFill>
+          </a:ln>
+          <a:effectLst/>
+        </p:spPr>
+      </p:cxnSp>
+      <p:cxnSp>
+        <p:nvCxnSpPr>
+          <p:cNvPr id="9" name="C3-E05 line 7" descr="sci-ppt:o007"/>
+          <p:cNvCxnSpPr/>
+          <p:nvPr/>
+        </p:nvCxnSpPr>
+        <p:spPr>
+          <a:xfrm>
+            <a:off x="2895600" y="1371600"/>
+            <a:ext cx="0" cy="3657600"/>
+          </a:xfrm>
+          <a:prstGeom prst="line">
+            <a:avLst/>
+          </a:prstGeom>
+          <a:ln w="7620">
+            <a:solidFill>
+              <a:srgbClr val="2E4756"/>
+            </a:solidFill>
+          </a:ln>
+          <a:effectLst/>
+        </p:spPr>
+      </p:cxnSp>
+      <p:sp>
+        <p:nvSpPr>
+          <p:cNvPr id="10" name="C3-E05 text 8" descr="sci-ppt:o008"/>
+          <p:cNvSpPr txBox="1"/>
+          <p:nvPr/>
+        </p:nvSpPr>
+        <p:spPr>
+          <a:xfrm>
+            <a:off x="2438400" y="5111496"/>
+            <a:ext cx="914400" cy="208407"/>
+          </a:xfrm>
+          <a:prstGeom prst="rect">
+            <a:avLst/>
+          </a:prstGeom>
+          <a:noFill/>
+          <a:effectLst/>
+        </p:spPr>
+        <p:txBody>
+          <a:bodyPr wrap="none" lIns="18288" rIns="18288" tIns="18288" bIns="18288" anchor="t">
+            <a:spAutoFit/>
+          </a:bodyPr>
+          <a:lstStyle/>
+          <a:p>
+            <a:pPr algn="ctr">
+              <a:spcAft>
+                <a:spcPts val="0"/>
+              </a:spcAft>
+            </a:pPr>
+            <a:r>
+              <a:rPr sz="1050" b="0" i="0">
+                <a:solidFill>
+                  <a:srgbClr val="B4C7D2"/>
+                </a:solidFill>
+                <a:latin typeface="Arial"/>
+              </a:rPr>
+              <a:t>0.5</a:t>
+            </a:r>
+          </a:p>
+        </p:txBody>
+      </p:sp>
+      <p:cxnSp>
+        <p:nvCxnSpPr>
+          <p:cNvPr id="11" name="C3-E05 line 9" descr="sci-ppt:o009"/>
+          <p:cNvCxnSpPr/>
+          <p:nvPr/>
+        </p:nvCxnSpPr>
+        <p:spPr>
+          <a:xfrm>
+            <a:off x="4876800" y="5029200"/>
+            <a:ext cx="0" cy="64008"/>
+          </a:xfrm>
+          <a:prstGeom prst="line">
+            <a:avLst/>
+          </a:prstGeom>
+          <a:ln w="12700">
+            <a:solidFill>
+              <a:srgbClr val="B4C7D2"/>
+            </a:solidFill>
+          </a:ln>
+          <a:effectLst/>
+        </p:spPr>
+      </p:cxnSp>
+      <p:cxnSp>
+        <p:nvCxnSpPr>
+          <p:cNvPr id="12" name="C3-E05 line 10" descr="sci-ppt:o010"/>
+          <p:cNvCxnSpPr/>
+          <p:nvPr/>
+        </p:nvCxnSpPr>
+        <p:spPr>
+          <a:xfrm>
+            <a:off x="4876800" y="1371600"/>
+            <a:ext cx="0" cy="3657600"/>
+          </a:xfrm>
+          <a:prstGeom prst="line">
+            <a:avLst/>
+          </a:prstGeom>
+          <a:ln w="7620">
+            <a:solidFill>
+              <a:srgbClr val="2E4756"/>
+            </a:solidFill>
+          </a:ln>
+          <a:effectLst/>
+        </p:spPr>
+      </p:cxnSp>
+      <p:sp>
+        <p:nvSpPr>
+          <p:cNvPr id="13" name="C3-E05 text 11" descr="sci-ppt:o011"/>
+          <p:cNvSpPr txBox="1"/>
+          <p:nvPr/>
+        </p:nvSpPr>
+        <p:spPr>
+          <a:xfrm>
+            <a:off x="4419600" y="5111496"/>
+            <a:ext cx="914400" cy="208407"/>
+          </a:xfrm>
+          <a:prstGeom prst="rect">
+            <a:avLst/>
+          </a:prstGeom>
+          <a:noFill/>
+          <a:effectLst/>
+        </p:spPr>
+        <p:txBody>
+          <a:bodyPr wrap="none" lIns="18288" rIns="18288" tIns="18288" bIns="18288" anchor="t">
+            <a:spAutoFit/>
+          </a:bodyPr>
+          <a:lstStyle/>
+          <a:p>
+            <a:pPr algn="ctr">
+              <a:spcAft>
+                <a:spcPts val="0"/>
+              </a:spcAft>
+            </a:pPr>
+            <a:r>
+              <a:rPr sz="1050" b="0" i="0">
+                <a:solidFill>
+                  <a:srgbClr val="B4C7D2"/>
+                </a:solidFill>
+                <a:latin typeface="Arial"/>
+              </a:rPr>
+              <a:t>1.0</a:t>
+            </a:r>
+          </a:p>
+        </p:txBody>
+      </p:sp>
+      <p:cxnSp>
+        <p:nvCxnSpPr>
+          <p:cNvPr id="14" name="C3-E05 line 12" descr="sci-ppt:o012"/>
+          <p:cNvCxnSpPr/>
+          <p:nvPr/>
+        </p:nvCxnSpPr>
+        <p:spPr>
+          <a:xfrm>
+            <a:off x="6858000" y="5029200"/>
+            <a:ext cx="0" cy="64008"/>
+          </a:xfrm>
+          <a:prstGeom prst="line">
+            <a:avLst/>
+          </a:prstGeom>
+          <a:ln w="12700">
+            <a:solidFill>
+              <a:srgbClr val="B4C7D2"/>
+            </a:solidFill>
+          </a:ln>
+          <a:effectLst/>
+        </p:spPr>
+      </p:cxnSp>
+      <p:cxnSp>
+        <p:nvCxnSpPr>
+          <p:cNvPr id="15" name="C3-E05 line 13" descr="sci-ppt:o013"/>
+          <p:cNvCxnSpPr/>
+          <p:nvPr/>
+        </p:nvCxnSpPr>
+        <p:spPr>
+          <a:xfrm>
+            <a:off x="6858000" y="1371600"/>
+            <a:ext cx="0" cy="3657600"/>
+          </a:xfrm>
+          <a:prstGeom prst="line">
+            <a:avLst/>
+          </a:prstGeom>
+          <a:ln w="7620">
+            <a:solidFill>
+              <a:srgbClr val="2E4756"/>
+            </a:solidFill>
+          </a:ln>
+          <a:effectLst/>
+        </p:spPr>
+      </p:cxnSp>
+      <p:sp>
+        <p:nvSpPr>
+          <p:cNvPr id="16" name="C3-E05 text 14" descr="sci-ppt:o014"/>
+          <p:cNvSpPr txBox="1"/>
+          <p:nvPr/>
+        </p:nvSpPr>
+        <p:spPr>
+          <a:xfrm>
+            <a:off x="6400800" y="5111496"/>
+            <a:ext cx="914400" cy="208407"/>
+          </a:xfrm>
+          <a:prstGeom prst="rect">
+            <a:avLst/>
+          </a:prstGeom>
+          <a:noFill/>
+          <a:effectLst/>
+        </p:spPr>
+        <p:txBody>
+          <a:bodyPr wrap="none" lIns="18288" rIns="18288" tIns="18288" bIns="18288" anchor="t">
+            <a:spAutoFit/>
+          </a:bodyPr>
+          <a:lstStyle/>
+          <a:p>
+            <a:pPr algn="ctr">
+              <a:spcAft>
+                <a:spcPts val="0"/>
+              </a:spcAft>
+            </a:pPr>
+            <a:r>
+              <a:rPr sz="1050" b="0" i="0">
+                <a:solidFill>
+                  <a:srgbClr val="B4C7D2"/>
+                </a:solidFill>
+                <a:latin typeface="Arial"/>
+              </a:rPr>
+              <a:t>1.5</a:t>
+            </a:r>
+          </a:p>
+        </p:txBody>
+      </p:sp>
+      <p:cxnSp>
+        <p:nvCxnSpPr>
+          <p:cNvPr id="17" name="C3-E05 line 15" descr="sci-ppt:o015"/>
+          <p:cNvCxnSpPr/>
+          <p:nvPr/>
+        </p:nvCxnSpPr>
+        <p:spPr>
+          <a:xfrm>
+            <a:off x="850392" y="5029200"/>
+            <a:ext cx="64008" cy="0"/>
+          </a:xfrm>
+          <a:prstGeom prst="line">
+            <a:avLst/>
+          </a:prstGeom>
+          <a:ln w="12700">
+            <a:solidFill>
+              <a:srgbClr val="B4C7D2"/>
+            </a:solidFill>
+          </a:ln>
+          <a:effectLst/>
+        </p:spPr>
+      </p:cxnSp>
+      <p:cxnSp>
+        <p:nvCxnSpPr>
+          <p:cNvPr id="18" name="C3-E05 line 16" descr="sci-ppt:o016"/>
+          <p:cNvCxnSpPr/>
+          <p:nvPr/>
+        </p:nvCxnSpPr>
+        <p:spPr>
+          <a:xfrm>
+            <a:off x="850392" y="3886200"/>
+            <a:ext cx="64008" cy="0"/>
+          </a:xfrm>
+          <a:prstGeom prst="line">
+            <a:avLst/>
+          </a:prstGeom>
+          <a:ln w="12700">
+            <a:solidFill>
+              <a:srgbClr val="B4C7D2"/>
+            </a:solidFill>
+          </a:ln>
+          <a:effectLst/>
+        </p:spPr>
+      </p:cxnSp>
+      <p:cxnSp>
+        <p:nvCxnSpPr>
+          <p:cNvPr id="19" name="C3-E05 line 17" descr="sci-ppt:o017"/>
+          <p:cNvCxnSpPr/>
+          <p:nvPr/>
+        </p:nvCxnSpPr>
+        <p:spPr>
+          <a:xfrm>
+            <a:off x="914400" y="3886200"/>
+            <a:ext cx="5943600" cy="0"/>
+          </a:xfrm>
+          <a:prstGeom prst="line">
+            <a:avLst/>
+          </a:prstGeom>
+          <a:ln w="7620">
+            <a:solidFill>
+              <a:srgbClr val="2E4756"/>
+            </a:solidFill>
+          </a:ln>
+          <a:effectLst/>
+        </p:spPr>
+      </p:cxnSp>
+      <p:sp>
+        <p:nvSpPr>
+          <p:cNvPr id="20" name="C3-E05 text 18" descr="sci-ppt:o018"/>
+          <p:cNvSpPr txBox="1"/>
+          <p:nvPr/>
+        </p:nvSpPr>
+        <p:spPr>
+          <a:xfrm>
+            <a:off x="45720" y="3803904"/>
+            <a:ext cx="777240" cy="208407"/>
+          </a:xfrm>
+          <a:prstGeom prst="rect">
+            <a:avLst/>
+          </a:prstGeom>
+          <a:noFill/>
+          <a:effectLst/>
+        </p:spPr>
+        <p:txBody>
+          <a:bodyPr wrap="none" lIns="18288" rIns="18288" tIns="18288" bIns="18288" anchor="t">
+            <a:spAutoFit/>
+          </a:bodyPr>
+          <a:lstStyle/>
+          <a:p>
+            <a:pPr algn="r">
+              <a:spcAft>
+                <a:spcPts val="0"/>
+              </a:spcAft>
+            </a:pPr>
+            <a:r>
+              <a:rPr sz="1050" b="0" i="0">
+                <a:solidFill>
+                  <a:srgbClr val="B4C7D2"/>
+                </a:solidFill>
+                <a:latin typeface="Arial"/>
+              </a:rPr>
+              <a:t>1</a:t>
+            </a:r>
+          </a:p>
+        </p:txBody>
+      </p:sp>
+      <p:cxnSp>
+        <p:nvCxnSpPr>
+          <p:cNvPr id="21" name="C3-E05 line 19" descr="sci-ppt:o019"/>
+          <p:cNvCxnSpPr/>
+          <p:nvPr/>
+        </p:nvCxnSpPr>
+        <p:spPr>
+          <a:xfrm>
+            <a:off x="850392" y="2743200"/>
+            <a:ext cx="64008" cy="0"/>
+          </a:xfrm>
+          <a:prstGeom prst="line">
+            <a:avLst/>
+          </a:prstGeom>
+          <a:ln w="12700">
+            <a:solidFill>
+              <a:srgbClr val="B4C7D2"/>
+            </a:solidFill>
+          </a:ln>
+          <a:effectLst/>
+        </p:spPr>
+      </p:cxnSp>
+      <p:cxnSp>
+        <p:nvCxnSpPr>
+          <p:cNvPr id="22" name="C3-E05 line 20" descr="sci-ppt:o020"/>
+          <p:cNvCxnSpPr/>
+          <p:nvPr/>
+        </p:nvCxnSpPr>
+        <p:spPr>
+          <a:xfrm>
+            <a:off x="914400" y="2743200"/>
+            <a:ext cx="5943600" cy="0"/>
+          </a:xfrm>
+          <a:prstGeom prst="line">
+            <a:avLst/>
+          </a:prstGeom>
+          <a:ln w="7620">
+            <a:solidFill>
+              <a:srgbClr val="2E4756"/>
+            </a:solidFill>
+          </a:ln>
+          <a:effectLst/>
+        </p:spPr>
+      </p:cxnSp>
+      <p:sp>
+        <p:nvSpPr>
+          <p:cNvPr id="23" name="C3-E05 text 21" descr="sci-ppt:o021"/>
+          <p:cNvSpPr txBox="1"/>
+          <p:nvPr/>
+        </p:nvSpPr>
+        <p:spPr>
+          <a:xfrm>
+            <a:off x="45720" y="2660904"/>
+            <a:ext cx="777240" cy="208407"/>
+          </a:xfrm>
+          <a:prstGeom prst="rect">
+            <a:avLst/>
+          </a:prstGeom>
+          <a:noFill/>
+          <a:effectLst/>
+        </p:spPr>
+        <p:txBody>
+          <a:bodyPr wrap="none" lIns="18288" rIns="18288" tIns="18288" bIns="18288" anchor="t">
+            <a:spAutoFit/>
+          </a:bodyPr>
+          <a:lstStyle/>
+          <a:p>
+            <a:pPr algn="r">
+              <a:spcAft>
+                <a:spcPts val="0"/>
+              </a:spcAft>
+            </a:pPr>
+            <a:r>
+              <a:rPr sz="1050" b="0" i="0">
+                <a:solidFill>
+                  <a:srgbClr val="B4C7D2"/>
+                </a:solidFill>
+                <a:latin typeface="Arial"/>
+              </a:rPr>
+              <a:t>2</a:t>
+            </a:r>
+          </a:p>
+        </p:txBody>
+      </p:sp>
+      <p:cxnSp>
+        <p:nvCxnSpPr>
+          <p:cNvPr id="24" name="C3-E05 line 22" descr="sci-ppt:o022"/>
+          <p:cNvCxnSpPr/>
+          <p:nvPr/>
+        </p:nvCxnSpPr>
+        <p:spPr>
+          <a:xfrm>
+            <a:off x="850392" y="1600200"/>
+            <a:ext cx="64008" cy="0"/>
+          </a:xfrm>
+          <a:prstGeom prst="line">
+            <a:avLst/>
+          </a:prstGeom>
+          <a:ln w="12700">
+            <a:solidFill>
+              <a:srgbClr val="B4C7D2"/>
+            </a:solidFill>
+          </a:ln>
+          <a:effectLst/>
+        </p:spPr>
+      </p:cxnSp>
+      <p:cxnSp>
+        <p:nvCxnSpPr>
+          <p:cNvPr id="25" name="C3-E05 line 23" descr="sci-ppt:o023"/>
+          <p:cNvCxnSpPr/>
+          <p:nvPr/>
+        </p:nvCxnSpPr>
+        <p:spPr>
+          <a:xfrm>
+            <a:off x="914400" y="1600200"/>
+            <a:ext cx="5943600" cy="0"/>
+          </a:xfrm>
+          <a:prstGeom prst="line">
+            <a:avLst/>
+          </a:prstGeom>
+          <a:ln w="7620">
+            <a:solidFill>
+              <a:srgbClr val="2E4756"/>
+            </a:solidFill>
+          </a:ln>
+          <a:effectLst/>
+        </p:spPr>
+      </p:cxnSp>
+      <p:sp>
+        <p:nvSpPr>
+          <p:cNvPr id="26" name="C3-E05 text 24" descr="sci-ppt:o024"/>
+          <p:cNvSpPr txBox="1"/>
+          <p:nvPr/>
+        </p:nvSpPr>
+        <p:spPr>
+          <a:xfrm>
+            <a:off x="45720" y="1517904"/>
+            <a:ext cx="777240" cy="208407"/>
+          </a:xfrm>
+          <a:prstGeom prst="rect">
+            <a:avLst/>
+          </a:prstGeom>
+          <a:noFill/>
+          <a:effectLst/>
+        </p:spPr>
+        <p:txBody>
+          <a:bodyPr wrap="none" lIns="18288" rIns="18288" tIns="18288" bIns="18288" anchor="t">
+            <a:spAutoFit/>
+          </a:bodyPr>
+          <a:lstStyle/>
+          <a:p>
+            <a:pPr algn="r">
+              <a:spcAft>
+                <a:spcPts val="0"/>
+              </a:spcAft>
+            </a:pPr>
+            <a:r>
+              <a:rPr sz="1050" b="0" i="0">
+                <a:solidFill>
+                  <a:srgbClr val="B4C7D2"/>
+                </a:solidFill>
+                <a:latin typeface="Arial"/>
+              </a:rPr>
+              <a:t>3</a:t>
+            </a:r>
+          </a:p>
+        </p:txBody>
+      </p:sp>
+      <p:sp>
+        <p:nvSpPr>
+          <p:cNvPr id="27" name="C3-E05 text 25" descr="sci-ppt:o025"/>
+          <p:cNvSpPr txBox="1"/>
+          <p:nvPr/>
+        </p:nvSpPr>
+        <p:spPr>
+          <a:xfrm>
+            <a:off x="914400" y="5312664"/>
+            <a:ext cx="5943600" cy="231648"/>
+          </a:xfrm>
+          <a:prstGeom prst="rect">
+            <a:avLst/>
+          </a:prstGeom>
+          <a:noFill/>
+          <a:effectLst/>
+        </p:spPr>
+        <p:txBody>
+          <a:bodyPr wrap="none" lIns="18288" rIns="18288" tIns="18288" bIns="18288" anchor="t">
+            <a:spAutoFit/>
+          </a:bodyPr>
+          <a:lstStyle/>
+          <a:p>
+            <a:pPr algn="ctr">
+              <a:spcAft>
+                <a:spcPts val="0"/>
+              </a:spcAft>
+            </a:pPr>
+            <a:r>
+              <a:rPr sz="1200" b="0" i="0">
+                <a:solidFill>
+                  <a:srgbClr val="E7F0F3"/>
+                </a:solidFill>
+                <a:latin typeface="Arial"/>
+              </a:rPr>
+              <a:t>t  (µs)</a:t>
+            </a:r>
+          </a:p>
+        </p:txBody>
+      </p:sp>
+      <p:sp>
+        <p:nvSpPr>
+          <p:cNvPr id="28" name="C3-E05 text 26" descr="sci-ppt:o026"/>
+          <p:cNvSpPr txBox="1"/>
+          <p:nvPr/>
+        </p:nvSpPr>
+        <p:spPr>
+          <a:xfrm>
+            <a:off x="365760" y="1024128"/>
+            <a:ext cx="5943600" cy="231648"/>
+          </a:xfrm>
+          <a:prstGeom prst="rect">
+            <a:avLst/>
+          </a:prstGeom>
+          <a:noFill/>
+          <a:effectLst/>
+        </p:spPr>
+        <p:txBody>
+          <a:bodyPr wrap="none" lIns="18288" rIns="18288" tIns="18288" bIns="18288" anchor="t">
             <a:spAutoFit/>
           </a:bodyPr>
           <a:lstStyle/>
@@ -3229,27 +3859,1532 @@
               </a:spcAft>
             </a:pPr>
             <a:r>
-              <a:rPr sz="1700" b="0" i="0">
+              <a:rPr sz="1200" b="0" i="0">
                 <a:solidFill>
                   <a:srgbClr val="E7F0F3"/>
                 </a:solidFill>
                 <a:latin typeface="Arial"/>
               </a:rPr>
-              <a:t>j: source</a:t>
-            </a:r>
-          </a:p>
-        </p:txBody>
-      </p:sp>
-      <p:sp>
-        <p:nvSpPr>
-          <p:cNvPr id="6" name="C3-E05 text 4" descr="sci-ppt:o004"/>
+              <a:t>R / R₀</a:t>
+            </a:r>
+          </a:p>
+        </p:txBody>
+      </p:sp>
+      <p:sp>
+        <p:nvSpPr>
+          <p:cNvPr id="29" name="C3-E05 polygon 27" descr="sci-ppt:o027"/>
+          <p:cNvSpPr/>
+          <p:nvPr/>
+        </p:nvSpPr>
+        <p:spPr>
+          <a:xfrm>
+            <a:off x="914400" y="2231317"/>
+            <a:ext cx="5943600" cy="1654883"/>
+          </a:xfrm>
+          <a:custGeom>
+            <a:avLst/>
+            <a:gdLst/>
+            <a:ahLst/>
+            <a:cxnLst/>
+            <a:rect l="l" t="t" r="r" b="b"/>
+            <a:pathLst>
+              <a:path w="5943600" h="1654883">
+                <a:moveTo>
+                  <a:pt x="0" y="1654883"/>
+                </a:moveTo>
+                <a:lnTo>
+                  <a:pt x="39690" y="1652893"/>
+                </a:lnTo>
+                <a:lnTo>
+                  <a:pt x="79380" y="1646991"/>
+                </a:lnTo>
+                <a:lnTo>
+                  <a:pt x="119070" y="1637353"/>
+                </a:lnTo>
+                <a:lnTo>
+                  <a:pt x="158760" y="1624256"/>
+                </a:lnTo>
+                <a:lnTo>
+                  <a:pt x="198450" y="1608041"/>
+                </a:lnTo>
+                <a:lnTo>
+                  <a:pt x="238140" y="1589092"/>
+                </a:lnTo>
+                <a:lnTo>
+                  <a:pt x="277831" y="1567805"/>
+                </a:lnTo>
+                <a:lnTo>
+                  <a:pt x="317521" y="1544569"/>
+                </a:lnTo>
+                <a:lnTo>
+                  <a:pt x="357211" y="1519750"/>
+                </a:lnTo>
+                <a:lnTo>
+                  <a:pt x="396901" y="1493678"/>
+                </a:lnTo>
+                <a:lnTo>
+                  <a:pt x="436591" y="1466649"/>
+                </a:lnTo>
+                <a:lnTo>
+                  <a:pt x="476281" y="1438916"/>
+                </a:lnTo>
+                <a:lnTo>
+                  <a:pt x="515971" y="1410697"/>
+                </a:lnTo>
+                <a:lnTo>
+                  <a:pt x="555662" y="1382175"/>
+                </a:lnTo>
+                <a:lnTo>
+                  <a:pt x="595352" y="1353503"/>
+                </a:lnTo>
+                <a:lnTo>
+                  <a:pt x="635042" y="1324805"/>
+                </a:lnTo>
+                <a:lnTo>
+                  <a:pt x="674732" y="1296184"/>
+                </a:lnTo>
+                <a:lnTo>
+                  <a:pt x="714422" y="1267724"/>
+                </a:lnTo>
+                <a:lnTo>
+                  <a:pt x="754112" y="1239490"/>
+                </a:lnTo>
+                <a:lnTo>
+                  <a:pt x="793803" y="1211537"/>
+                </a:lnTo>
+                <a:lnTo>
+                  <a:pt x="833493" y="1183906"/>
+                </a:lnTo>
+                <a:lnTo>
+                  <a:pt x="873183" y="1156630"/>
+                </a:lnTo>
+                <a:lnTo>
+                  <a:pt x="912873" y="1129733"/>
+                </a:lnTo>
+                <a:lnTo>
+                  <a:pt x="952563" y="1103236"/>
+                </a:lnTo>
+                <a:lnTo>
+                  <a:pt x="992253" y="1077151"/>
+                </a:lnTo>
+                <a:lnTo>
+                  <a:pt x="1031943" y="1051489"/>
+                </a:lnTo>
+                <a:lnTo>
+                  <a:pt x="1071634" y="1026254"/>
+                </a:lnTo>
+                <a:lnTo>
+                  <a:pt x="1111324" y="1001451"/>
+                </a:lnTo>
+                <a:lnTo>
+                  <a:pt x="1151014" y="977081"/>
+                </a:lnTo>
+                <a:lnTo>
+                  <a:pt x="1190704" y="953143"/>
+                </a:lnTo>
+                <a:lnTo>
+                  <a:pt x="1230394" y="929636"/>
+                </a:lnTo>
+                <a:lnTo>
+                  <a:pt x="1270084" y="906555"/>
+                </a:lnTo>
+                <a:lnTo>
+                  <a:pt x="1309774" y="883897"/>
+                </a:lnTo>
+                <a:lnTo>
+                  <a:pt x="1349465" y="861657"/>
+                </a:lnTo>
+                <a:lnTo>
+                  <a:pt x="1389155" y="839830"/>
+                </a:lnTo>
+                <a:lnTo>
+                  <a:pt x="1428845" y="818410"/>
+                </a:lnTo>
+                <a:lnTo>
+                  <a:pt x="1468535" y="797391"/>
+                </a:lnTo>
+                <a:lnTo>
+                  <a:pt x="1508225" y="776767"/>
+                </a:lnTo>
+                <a:lnTo>
+                  <a:pt x="1547915" y="756532"/>
+                </a:lnTo>
+                <a:lnTo>
+                  <a:pt x="1587606" y="736679"/>
+                </a:lnTo>
+                <a:lnTo>
+                  <a:pt x="1627296" y="717201"/>
+                </a:lnTo>
+                <a:lnTo>
+                  <a:pt x="1666986" y="698093"/>
+                </a:lnTo>
+                <a:lnTo>
+                  <a:pt x="1706676" y="679348"/>
+                </a:lnTo>
+                <a:lnTo>
+                  <a:pt x="1746366" y="660959"/>
+                </a:lnTo>
+                <a:lnTo>
+                  <a:pt x="1786056" y="642920"/>
+                </a:lnTo>
+                <a:lnTo>
+                  <a:pt x="1825746" y="625226"/>
+                </a:lnTo>
+                <a:lnTo>
+                  <a:pt x="1865437" y="607871"/>
+                </a:lnTo>
+                <a:lnTo>
+                  <a:pt x="1905127" y="590847"/>
+                </a:lnTo>
+                <a:lnTo>
+                  <a:pt x="1944817" y="574151"/>
+                </a:lnTo>
+                <a:lnTo>
+                  <a:pt x="1984507" y="557775"/>
+                </a:lnTo>
+                <a:lnTo>
+                  <a:pt x="2024197" y="541716"/>
+                </a:lnTo>
+                <a:lnTo>
+                  <a:pt x="2063887" y="525967"/>
+                </a:lnTo>
+                <a:lnTo>
+                  <a:pt x="2103577" y="510523"/>
+                </a:lnTo>
+                <a:lnTo>
+                  <a:pt x="2143268" y="495379"/>
+                </a:lnTo>
+                <a:lnTo>
+                  <a:pt x="2182958" y="480531"/>
+                </a:lnTo>
+                <a:lnTo>
+                  <a:pt x="2222648" y="465974"/>
+                </a:lnTo>
+                <a:lnTo>
+                  <a:pt x="2262338" y="451703"/>
+                </a:lnTo>
+                <a:lnTo>
+                  <a:pt x="2302028" y="437714"/>
+                </a:lnTo>
+                <a:lnTo>
+                  <a:pt x="2341718" y="424002"/>
+                </a:lnTo>
+                <a:lnTo>
+                  <a:pt x="2381409" y="410564"/>
+                </a:lnTo>
+                <a:lnTo>
+                  <a:pt x="2421099" y="397395"/>
+                </a:lnTo>
+                <a:lnTo>
+                  <a:pt x="2460789" y="384492"/>
+                </a:lnTo>
+                <a:lnTo>
+                  <a:pt x="2500479" y="371850"/>
+                </a:lnTo>
+                <a:lnTo>
+                  <a:pt x="2540169" y="359466"/>
+                </a:lnTo>
+                <a:lnTo>
+                  <a:pt x="2579859" y="347336"/>
+                </a:lnTo>
+                <a:lnTo>
+                  <a:pt x="2619549" y="335457"/>
+                </a:lnTo>
+                <a:lnTo>
+                  <a:pt x="2659240" y="323827"/>
+                </a:lnTo>
+                <a:lnTo>
+                  <a:pt x="2698930" y="312440"/>
+                </a:lnTo>
+                <a:lnTo>
+                  <a:pt x="2738620" y="301295"/>
+                </a:lnTo>
+                <a:lnTo>
+                  <a:pt x="2778310" y="290388"/>
+                </a:lnTo>
+                <a:lnTo>
+                  <a:pt x="2818000" y="279717"/>
+                </a:lnTo>
+                <a:lnTo>
+                  <a:pt x="2857690" y="269278"/>
+                </a:lnTo>
+                <a:lnTo>
+                  <a:pt x="2897380" y="259069"/>
+                </a:lnTo>
+                <a:lnTo>
+                  <a:pt x="2937071" y="249087"/>
+                </a:lnTo>
+                <a:lnTo>
+                  <a:pt x="2976761" y="239330"/>
+                </a:lnTo>
+                <a:lnTo>
+                  <a:pt x="3016451" y="229795"/>
+                </a:lnTo>
+                <a:lnTo>
+                  <a:pt x="3056141" y="220480"/>
+                </a:lnTo>
+                <a:lnTo>
+                  <a:pt x="3095831" y="211382"/>
+                </a:lnTo>
+                <a:lnTo>
+                  <a:pt x="3135521" y="202500"/>
+                </a:lnTo>
+                <a:lnTo>
+                  <a:pt x="3175212" y="193830"/>
+                </a:lnTo>
+                <a:lnTo>
+                  <a:pt x="3214902" y="185372"/>
+                </a:lnTo>
+                <a:lnTo>
+                  <a:pt x="3254592" y="177122"/>
+                </a:lnTo>
+                <a:lnTo>
+                  <a:pt x="3294282" y="169080"/>
+                </a:lnTo>
+                <a:lnTo>
+                  <a:pt x="3333972" y="161242"/>
+                </a:lnTo>
+                <a:lnTo>
+                  <a:pt x="3373662" y="153608"/>
+                </a:lnTo>
+                <a:lnTo>
+                  <a:pt x="3413352" y="146176"/>
+                </a:lnTo>
+                <a:lnTo>
+                  <a:pt x="3453043" y="138943"/>
+                </a:lnTo>
+                <a:lnTo>
+                  <a:pt x="3492733" y="131908"/>
+                </a:lnTo>
+                <a:lnTo>
+                  <a:pt x="3532423" y="125070"/>
+                </a:lnTo>
+                <a:lnTo>
+                  <a:pt x="3572113" y="118427"/>
+                </a:lnTo>
+                <a:lnTo>
+                  <a:pt x="3611803" y="111978"/>
+                </a:lnTo>
+                <a:lnTo>
+                  <a:pt x="3651493" y="105721"/>
+                </a:lnTo>
+                <a:lnTo>
+                  <a:pt x="3691183" y="99654"/>
+                </a:lnTo>
+                <a:lnTo>
+                  <a:pt x="3730874" y="93777"/>
+                </a:lnTo>
+                <a:lnTo>
+                  <a:pt x="3770564" y="88088"/>
+                </a:lnTo>
+                <a:lnTo>
+                  <a:pt x="3810254" y="82587"/>
+                </a:lnTo>
+                <a:lnTo>
+                  <a:pt x="3849944" y="77270"/>
+                </a:lnTo>
+                <a:lnTo>
+                  <a:pt x="3889634" y="72139"/>
+                </a:lnTo>
+                <a:lnTo>
+                  <a:pt x="3929324" y="67191"/>
+                </a:lnTo>
+                <a:lnTo>
+                  <a:pt x="3969015" y="62426"/>
+                </a:lnTo>
+                <a:lnTo>
+                  <a:pt x="4008705" y="57842"/>
+                </a:lnTo>
+                <a:lnTo>
+                  <a:pt x="4048395" y="53438"/>
+                </a:lnTo>
+                <a:lnTo>
+                  <a:pt x="4088085" y="49215"/>
+                </a:lnTo>
+                <a:lnTo>
+                  <a:pt x="4127775" y="45170"/>
+                </a:lnTo>
+                <a:lnTo>
+                  <a:pt x="4167465" y="41303"/>
+                </a:lnTo>
+                <a:lnTo>
+                  <a:pt x="4207155" y="37613"/>
+                </a:lnTo>
+                <a:lnTo>
+                  <a:pt x="4246846" y="34099"/>
+                </a:lnTo>
+                <a:lnTo>
+                  <a:pt x="4286536" y="30761"/>
+                </a:lnTo>
+                <a:lnTo>
+                  <a:pt x="4326226" y="27598"/>
+                </a:lnTo>
+                <a:lnTo>
+                  <a:pt x="4365916" y="24609"/>
+                </a:lnTo>
+                <a:lnTo>
+                  <a:pt x="4405606" y="21794"/>
+                </a:lnTo>
+                <a:lnTo>
+                  <a:pt x="4445296" y="19152"/>
+                </a:lnTo>
+                <a:lnTo>
+                  <a:pt x="4484986" y="16682"/>
+                </a:lnTo>
+                <a:lnTo>
+                  <a:pt x="4524677" y="14385"/>
+                </a:lnTo>
+                <a:lnTo>
+                  <a:pt x="4564367" y="12259"/>
+                </a:lnTo>
+                <a:lnTo>
+                  <a:pt x="4604057" y="10304"/>
+                </a:lnTo>
+                <a:lnTo>
+                  <a:pt x="4643747" y="8520"/>
+                </a:lnTo>
+                <a:lnTo>
+                  <a:pt x="4683437" y="6906"/>
+                </a:lnTo>
+                <a:lnTo>
+                  <a:pt x="4723127" y="5462"/>
+                </a:lnTo>
+                <a:lnTo>
+                  <a:pt x="4762818" y="4188"/>
+                </a:lnTo>
+                <a:lnTo>
+                  <a:pt x="4802508" y="3084"/>
+                </a:lnTo>
+                <a:lnTo>
+                  <a:pt x="4842198" y="2148"/>
+                </a:lnTo>
+                <a:lnTo>
+                  <a:pt x="4881888" y="1381"/>
+                </a:lnTo>
+                <a:lnTo>
+                  <a:pt x="4921578" y="783"/>
+                </a:lnTo>
+                <a:lnTo>
+                  <a:pt x="4961268" y="354"/>
+                </a:lnTo>
+                <a:lnTo>
+                  <a:pt x="5000958" y="93"/>
+                </a:lnTo>
+                <a:lnTo>
+                  <a:pt x="5040649" y="0"/>
+                </a:lnTo>
+                <a:lnTo>
+                  <a:pt x="5080339" y="76"/>
+                </a:lnTo>
+                <a:lnTo>
+                  <a:pt x="5120029" y="320"/>
+                </a:lnTo>
+                <a:lnTo>
+                  <a:pt x="5159719" y="732"/>
+                </a:lnTo>
+                <a:lnTo>
+                  <a:pt x="5199409" y="1313"/>
+                </a:lnTo>
+                <a:lnTo>
+                  <a:pt x="5239099" y="2062"/>
+                </a:lnTo>
+                <a:lnTo>
+                  <a:pt x="5278789" y="2979"/>
+                </a:lnTo>
+                <a:lnTo>
+                  <a:pt x="5318480" y="4065"/>
+                </a:lnTo>
+                <a:lnTo>
+                  <a:pt x="5358170" y="5320"/>
+                </a:lnTo>
+                <a:lnTo>
+                  <a:pt x="5397860" y="6743"/>
+                </a:lnTo>
+                <a:lnTo>
+                  <a:pt x="5437550" y="8336"/>
+                </a:lnTo>
+                <a:lnTo>
+                  <a:pt x="5477240" y="10098"/>
+                </a:lnTo>
+                <a:lnTo>
+                  <a:pt x="5516930" y="12030"/>
+                </a:lnTo>
+                <a:lnTo>
+                  <a:pt x="5556621" y="14131"/>
+                </a:lnTo>
+                <a:lnTo>
+                  <a:pt x="5596311" y="16403"/>
+                </a:lnTo>
+                <a:lnTo>
+                  <a:pt x="5636001" y="18846"/>
+                </a:lnTo>
+                <a:lnTo>
+                  <a:pt x="5675691" y="21460"/>
+                </a:lnTo>
+                <a:lnTo>
+                  <a:pt x="5715381" y="24245"/>
+                </a:lnTo>
+                <a:lnTo>
+                  <a:pt x="5755071" y="27202"/>
+                </a:lnTo>
+                <a:lnTo>
+                  <a:pt x="5794761" y="30332"/>
+                </a:lnTo>
+                <a:lnTo>
+                  <a:pt x="5834452" y="33635"/>
+                </a:lnTo>
+                <a:lnTo>
+                  <a:pt x="5874142" y="37111"/>
+                </a:lnTo>
+                <a:lnTo>
+                  <a:pt x="5913832" y="40762"/>
+                </a:lnTo>
+                <a:lnTo>
+                  <a:pt x="5943600" y="43615"/>
+                </a:lnTo>
+              </a:path>
+            </a:pathLst>
+          </a:custGeom>
+          <a:noFill/>
+          <a:ln w="38100">
+            <a:solidFill>
+              <a:srgbClr val="8EDBD4"/>
+            </a:solidFill>
+          </a:ln>
+          <a:effectLst/>
+        </p:spPr>
+        <p:txBody>
+          <a:bodyPr rtlCol="0" anchor="ctr"/>
+          <a:lstStyle/>
+          <a:p>
+            <a:pPr algn="ctr"/>
+          </a:p>
+        </p:txBody>
+      </p:sp>
+      <p:sp>
+        <p:nvSpPr>
+          <p:cNvPr id="30" name="C3-E05 polygon 28" descr="sci-ppt:o028"/>
+          <p:cNvSpPr/>
+          <p:nvPr/>
+        </p:nvSpPr>
+        <p:spPr>
+          <a:xfrm>
+            <a:off x="914400" y="2227731"/>
+            <a:ext cx="5943600" cy="1658469"/>
+          </a:xfrm>
+          <a:custGeom>
+            <a:avLst/>
+            <a:gdLst/>
+            <a:ahLst/>
+            <a:cxnLst/>
+            <a:rect l="l" t="t" r="r" b="b"/>
+            <a:pathLst>
+              <a:path w="5943600" h="1658469">
+                <a:moveTo>
+                  <a:pt x="0" y="1658469"/>
+                </a:moveTo>
+                <a:lnTo>
+                  <a:pt x="39690" y="1656763"/>
+                </a:lnTo>
+                <a:lnTo>
+                  <a:pt x="79380" y="1651695"/>
+                </a:lnTo>
+                <a:lnTo>
+                  <a:pt x="119070" y="1643402"/>
+                </a:lnTo>
+                <a:lnTo>
+                  <a:pt x="158760" y="1632095"/>
+                </a:lnTo>
+                <a:lnTo>
+                  <a:pt x="198450" y="1618040"/>
+                </a:lnTo>
+                <a:lnTo>
+                  <a:pt x="238140" y="1601542"/>
+                </a:lnTo>
+                <a:lnTo>
+                  <a:pt x="277831" y="1582918"/>
+                </a:lnTo>
+                <a:lnTo>
+                  <a:pt x="317521" y="1562490"/>
+                </a:lnTo>
+                <a:lnTo>
+                  <a:pt x="357211" y="1540561"/>
+                </a:lnTo>
+                <a:lnTo>
+                  <a:pt x="396901" y="1517414"/>
+                </a:lnTo>
+                <a:lnTo>
+                  <a:pt x="436591" y="1493307"/>
+                </a:lnTo>
+                <a:lnTo>
+                  <a:pt x="476281" y="1468464"/>
+                </a:lnTo>
+                <a:lnTo>
+                  <a:pt x="515971" y="1443082"/>
+                </a:lnTo>
+                <a:lnTo>
+                  <a:pt x="555662" y="1417329"/>
+                </a:lnTo>
+                <a:lnTo>
+                  <a:pt x="595352" y="1391349"/>
+                </a:lnTo>
+                <a:lnTo>
+                  <a:pt x="635042" y="1365261"/>
+                </a:lnTo>
+                <a:lnTo>
+                  <a:pt x="674732" y="1339164"/>
+                </a:lnTo>
+                <a:lnTo>
+                  <a:pt x="714422" y="1313141"/>
+                </a:lnTo>
+                <a:lnTo>
+                  <a:pt x="754112" y="1287259"/>
+                </a:lnTo>
+                <a:lnTo>
+                  <a:pt x="793803" y="1261573"/>
+                </a:lnTo>
+                <a:lnTo>
+                  <a:pt x="833493" y="1236126"/>
+                </a:lnTo>
+                <a:lnTo>
+                  <a:pt x="873183" y="1210955"/>
+                </a:lnTo>
+                <a:lnTo>
+                  <a:pt x="912873" y="1186085"/>
+                </a:lnTo>
+                <a:lnTo>
+                  <a:pt x="952563" y="1161540"/>
+                </a:lnTo>
+                <a:lnTo>
+                  <a:pt x="992253" y="1137335"/>
+                </a:lnTo>
+                <a:lnTo>
+                  <a:pt x="1031943" y="1113482"/>
+                </a:lnTo>
+                <a:lnTo>
+                  <a:pt x="1071634" y="1089990"/>
+                </a:lnTo>
+                <a:lnTo>
+                  <a:pt x="1111324" y="1066865"/>
+                </a:lnTo>
+                <a:lnTo>
+                  <a:pt x="1151014" y="1044110"/>
+                </a:lnTo>
+                <a:lnTo>
+                  <a:pt x="1190704" y="1021726"/>
+                </a:lnTo>
+                <a:lnTo>
+                  <a:pt x="1230394" y="999714"/>
+                </a:lnTo>
+                <a:lnTo>
+                  <a:pt x="1270084" y="978072"/>
+                </a:lnTo>
+                <a:lnTo>
+                  <a:pt x="1309774" y="956797"/>
+                </a:lnTo>
+                <a:lnTo>
+                  <a:pt x="1349465" y="935887"/>
+                </a:lnTo>
+                <a:lnTo>
+                  <a:pt x="1389155" y="915338"/>
+                </a:lnTo>
+                <a:lnTo>
+                  <a:pt x="1428845" y="895144"/>
+                </a:lnTo>
+                <a:lnTo>
+                  <a:pt x="1468535" y="875302"/>
+                </a:lnTo>
+                <a:lnTo>
+                  <a:pt x="1508225" y="855806"/>
+                </a:lnTo>
+                <a:lnTo>
+                  <a:pt x="1547915" y="836651"/>
+                </a:lnTo>
+                <a:lnTo>
+                  <a:pt x="1587606" y="817831"/>
+                </a:lnTo>
+                <a:lnTo>
+                  <a:pt x="1627296" y="799341"/>
+                </a:lnTo>
+                <a:lnTo>
+                  <a:pt x="1666986" y="781175"/>
+                </a:lnTo>
+                <a:lnTo>
+                  <a:pt x="1706676" y="763328"/>
+                </a:lnTo>
+                <a:lnTo>
+                  <a:pt x="1746366" y="745794"/>
+                </a:lnTo>
+                <a:lnTo>
+                  <a:pt x="1786056" y="728567"/>
+                </a:lnTo>
+                <a:lnTo>
+                  <a:pt x="1825746" y="711643"/>
+                </a:lnTo>
+                <a:lnTo>
+                  <a:pt x="1865437" y="695014"/>
+                </a:lnTo>
+                <a:lnTo>
+                  <a:pt x="1905127" y="678677"/>
+                </a:lnTo>
+                <a:lnTo>
+                  <a:pt x="1944817" y="662626"/>
+                </a:lnTo>
+                <a:lnTo>
+                  <a:pt x="1984507" y="646856"/>
+                </a:lnTo>
+                <a:lnTo>
+                  <a:pt x="2024197" y="631361"/>
+                </a:lnTo>
+                <a:lnTo>
+                  <a:pt x="2063887" y="616138"/>
+                </a:lnTo>
+                <a:lnTo>
+                  <a:pt x="2103577" y="601180"/>
+                </a:lnTo>
+                <a:lnTo>
+                  <a:pt x="2143268" y="586484"/>
+                </a:lnTo>
+                <a:lnTo>
+                  <a:pt x="2182958" y="572044"/>
+                </a:lnTo>
+                <a:lnTo>
+                  <a:pt x="2222648" y="557857"/>
+                </a:lnTo>
+                <a:lnTo>
+                  <a:pt x="2262338" y="543919"/>
+                </a:lnTo>
+                <a:lnTo>
+                  <a:pt x="2302028" y="530224"/>
+                </a:lnTo>
+                <a:lnTo>
+                  <a:pt x="2341718" y="516769"/>
+                </a:lnTo>
+                <a:lnTo>
+                  <a:pt x="2381409" y="503549"/>
+                </a:lnTo>
+                <a:lnTo>
+                  <a:pt x="2421099" y="490562"/>
+                </a:lnTo>
+                <a:lnTo>
+                  <a:pt x="2460789" y="477803"/>
+                </a:lnTo>
+                <a:lnTo>
+                  <a:pt x="2500479" y="465269"/>
+                </a:lnTo>
+                <a:lnTo>
+                  <a:pt x="2540169" y="452956"/>
+                </a:lnTo>
+                <a:lnTo>
+                  <a:pt x="2579859" y="440860"/>
+                </a:lnTo>
+                <a:lnTo>
+                  <a:pt x="2619549" y="428979"/>
+                </a:lnTo>
+                <a:lnTo>
+                  <a:pt x="2659240" y="417309"/>
+                </a:lnTo>
+                <a:lnTo>
+                  <a:pt x="2698930" y="405847"/>
+                </a:lnTo>
+                <a:lnTo>
+                  <a:pt x="2738620" y="394590"/>
+                </a:lnTo>
+                <a:lnTo>
+                  <a:pt x="2778310" y="383535"/>
+                </a:lnTo>
+                <a:lnTo>
+                  <a:pt x="2818000" y="372679"/>
+                </a:lnTo>
+                <a:lnTo>
+                  <a:pt x="2857690" y="362020"/>
+                </a:lnTo>
+                <a:lnTo>
+                  <a:pt x="2897380" y="351554"/>
+                </a:lnTo>
+                <a:lnTo>
+                  <a:pt x="2937071" y="341280"/>
+                </a:lnTo>
+                <a:lnTo>
+                  <a:pt x="2976761" y="331194"/>
+                </a:lnTo>
+                <a:lnTo>
+                  <a:pt x="3016451" y="321294"/>
+                </a:lnTo>
+                <a:lnTo>
+                  <a:pt x="3056141" y="311578"/>
+                </a:lnTo>
+                <a:lnTo>
+                  <a:pt x="3095831" y="302043"/>
+                </a:lnTo>
+                <a:lnTo>
+                  <a:pt x="3135521" y="292688"/>
+                </a:lnTo>
+                <a:lnTo>
+                  <a:pt x="3175212" y="283509"/>
+                </a:lnTo>
+                <a:lnTo>
+                  <a:pt x="3214902" y="274506"/>
+                </a:lnTo>
+                <a:lnTo>
+                  <a:pt x="3254592" y="265675"/>
+                </a:lnTo>
+                <a:lnTo>
+                  <a:pt x="3294282" y="257015"/>
+                </a:lnTo>
+                <a:lnTo>
+                  <a:pt x="3333972" y="248523"/>
+                </a:lnTo>
+                <a:lnTo>
+                  <a:pt x="3373662" y="240199"/>
+                </a:lnTo>
+                <a:lnTo>
+                  <a:pt x="3413352" y="232040"/>
+                </a:lnTo>
+                <a:lnTo>
+                  <a:pt x="3453043" y="224045"/>
+                </a:lnTo>
+                <a:lnTo>
+                  <a:pt x="3492733" y="216211"/>
+                </a:lnTo>
+                <a:lnTo>
+                  <a:pt x="3532423" y="208537"/>
+                </a:lnTo>
+                <a:lnTo>
+                  <a:pt x="3572113" y="201021"/>
+                </a:lnTo>
+                <a:lnTo>
+                  <a:pt x="3611803" y="193663"/>
+                </a:lnTo>
+                <a:lnTo>
+                  <a:pt x="3651493" y="186459"/>
+                </a:lnTo>
+                <a:lnTo>
+                  <a:pt x="3691183" y="179410"/>
+                </a:lnTo>
+                <a:lnTo>
+                  <a:pt x="3730874" y="172513"/>
+                </a:lnTo>
+                <a:lnTo>
+                  <a:pt x="3770564" y="165767"/>
+                </a:lnTo>
+                <a:lnTo>
+                  <a:pt x="3810254" y="159170"/>
+                </a:lnTo>
+                <a:lnTo>
+                  <a:pt x="3849944" y="152722"/>
+                </a:lnTo>
+                <a:lnTo>
+                  <a:pt x="3889634" y="146421"/>
+                </a:lnTo>
+                <a:lnTo>
+                  <a:pt x="3929324" y="140266"/>
+                </a:lnTo>
+                <a:lnTo>
+                  <a:pt x="3969015" y="134256"/>
+                </a:lnTo>
+                <a:lnTo>
+                  <a:pt x="4008705" y="128389"/>
+                </a:lnTo>
+                <a:lnTo>
+                  <a:pt x="4048395" y="122665"/>
+                </a:lnTo>
+                <a:lnTo>
+                  <a:pt x="4088085" y="117082"/>
+                </a:lnTo>
+                <a:lnTo>
+                  <a:pt x="4127775" y="111639"/>
+                </a:lnTo>
+                <a:lnTo>
+                  <a:pt x="4167465" y="106336"/>
+                </a:lnTo>
+                <a:lnTo>
+                  <a:pt x="4207155" y="101170"/>
+                </a:lnTo>
+                <a:lnTo>
+                  <a:pt x="4246846" y="96143"/>
+                </a:lnTo>
+                <a:lnTo>
+                  <a:pt x="4286536" y="91251"/>
+                </a:lnTo>
+                <a:lnTo>
+                  <a:pt x="4326226" y="86495"/>
+                </a:lnTo>
+                <a:lnTo>
+                  <a:pt x="4365916" y="81874"/>
+                </a:lnTo>
+                <a:lnTo>
+                  <a:pt x="4405606" y="77386"/>
+                </a:lnTo>
+                <a:lnTo>
+                  <a:pt x="4445296" y="73032"/>
+                </a:lnTo>
+                <a:lnTo>
+                  <a:pt x="4484986" y="68809"/>
+                </a:lnTo>
+                <a:lnTo>
+                  <a:pt x="4524677" y="64719"/>
+                </a:lnTo>
+                <a:lnTo>
+                  <a:pt x="4564367" y="60759"/>
+                </a:lnTo>
+                <a:lnTo>
+                  <a:pt x="4604057" y="56929"/>
+                </a:lnTo>
+                <a:lnTo>
+                  <a:pt x="4643747" y="53228"/>
+                </a:lnTo>
+                <a:lnTo>
+                  <a:pt x="4683437" y="49657"/>
+                </a:lnTo>
+                <a:lnTo>
+                  <a:pt x="4723127" y="46213"/>
+                </a:lnTo>
+                <a:lnTo>
+                  <a:pt x="4762818" y="42897"/>
+                </a:lnTo>
+                <a:lnTo>
+                  <a:pt x="4802508" y="39708"/>
+                </a:lnTo>
+                <a:lnTo>
+                  <a:pt x="4842198" y="36645"/>
+                </a:lnTo>
+                <a:lnTo>
+                  <a:pt x="4881888" y="33708"/>
+                </a:lnTo>
+                <a:lnTo>
+                  <a:pt x="4921578" y="30897"/>
+                </a:lnTo>
+                <a:lnTo>
+                  <a:pt x="4961268" y="28210"/>
+                </a:lnTo>
+                <a:lnTo>
+                  <a:pt x="5000958" y="25648"/>
+                </a:lnTo>
+                <a:lnTo>
+                  <a:pt x="5040649" y="23210"/>
+                </a:lnTo>
+                <a:lnTo>
+                  <a:pt x="5080339" y="20896"/>
+                </a:lnTo>
+                <a:lnTo>
+                  <a:pt x="5120029" y="18704"/>
+                </a:lnTo>
+                <a:lnTo>
+                  <a:pt x="5159719" y="16636"/>
+                </a:lnTo>
+                <a:lnTo>
+                  <a:pt x="5199409" y="14690"/>
+                </a:lnTo>
+                <a:lnTo>
+                  <a:pt x="5239099" y="12866"/>
+                </a:lnTo>
+                <a:lnTo>
+                  <a:pt x="5278789" y="11164"/>
+                </a:lnTo>
+                <a:lnTo>
+                  <a:pt x="5318480" y="9583"/>
+                </a:lnTo>
+                <a:lnTo>
+                  <a:pt x="5358170" y="8124"/>
+                </a:lnTo>
+                <a:lnTo>
+                  <a:pt x="5397860" y="6786"/>
+                </a:lnTo>
+                <a:lnTo>
+                  <a:pt x="5437550" y="5569"/>
+                </a:lnTo>
+                <a:lnTo>
+                  <a:pt x="5477240" y="4472"/>
+                </a:lnTo>
+                <a:lnTo>
+                  <a:pt x="5516930" y="3495"/>
+                </a:lnTo>
+                <a:lnTo>
+                  <a:pt x="5556621" y="2639"/>
+                </a:lnTo>
+                <a:lnTo>
+                  <a:pt x="5596311" y="1903"/>
+                </a:lnTo>
+                <a:lnTo>
+                  <a:pt x="5636001" y="1286"/>
+                </a:lnTo>
+                <a:lnTo>
+                  <a:pt x="5675691" y="790"/>
+                </a:lnTo>
+                <a:lnTo>
+                  <a:pt x="5715381" y="413"/>
+                </a:lnTo>
+                <a:lnTo>
+                  <a:pt x="5755071" y="156"/>
+                </a:lnTo>
+                <a:lnTo>
+                  <a:pt x="5794761" y="18"/>
+                </a:lnTo>
+                <a:lnTo>
+                  <a:pt x="5834452" y="0"/>
+                </a:lnTo>
+                <a:lnTo>
+                  <a:pt x="5874142" y="101"/>
+                </a:lnTo>
+                <a:lnTo>
+                  <a:pt x="5913832" y="322"/>
+                </a:lnTo>
+                <a:lnTo>
+                  <a:pt x="5943600" y="566"/>
+                </a:lnTo>
+              </a:path>
+            </a:pathLst>
+          </a:custGeom>
+          <a:noFill/>
+          <a:ln w="38100">
+            <a:solidFill>
+              <a:srgbClr val="F2B880"/>
+            </a:solidFill>
+          </a:ln>
+          <a:effectLst/>
+        </p:spPr>
+        <p:txBody>
+          <a:bodyPr rtlCol="0" anchor="ctr"/>
+          <a:lstStyle/>
+          <a:p>
+            <a:pPr algn="ctr"/>
+          </a:p>
+        </p:txBody>
+      </p:sp>
+      <p:sp>
+        <p:nvSpPr>
+          <p:cNvPr id="31" name="C3-E05 polygon 29" descr="sci-ppt:o029"/>
+          <p:cNvSpPr/>
+          <p:nvPr/>
+        </p:nvSpPr>
+        <p:spPr>
+          <a:xfrm>
+            <a:off x="914400" y="2234452"/>
+            <a:ext cx="5943600" cy="1651748"/>
+          </a:xfrm>
+          <a:custGeom>
+            <a:avLst/>
+            <a:gdLst/>
+            <a:ahLst/>
+            <a:cxnLst/>
+            <a:rect l="l" t="t" r="r" b="b"/>
+            <a:pathLst>
+              <a:path w="5943600" h="1651748">
+                <a:moveTo>
+                  <a:pt x="0" y="1651748"/>
+                </a:moveTo>
+                <a:lnTo>
+                  <a:pt x="39690" y="1650255"/>
+                </a:lnTo>
+                <a:lnTo>
+                  <a:pt x="79380" y="1645815"/>
+                </a:lnTo>
+                <a:lnTo>
+                  <a:pt x="119070" y="1638535"/>
+                </a:lnTo>
+                <a:lnTo>
+                  <a:pt x="158760" y="1628583"/>
+                </a:lnTo>
+                <a:lnTo>
+                  <a:pt x="198450" y="1616174"/>
+                </a:lnTo>
+                <a:lnTo>
+                  <a:pt x="238140" y="1601551"/>
+                </a:lnTo>
+                <a:lnTo>
+                  <a:pt x="277831" y="1584979"/>
+                </a:lnTo>
+                <a:lnTo>
+                  <a:pt x="317521" y="1566723"/>
+                </a:lnTo>
+                <a:lnTo>
+                  <a:pt x="357211" y="1547043"/>
+                </a:lnTo>
+                <a:lnTo>
+                  <a:pt x="396901" y="1526182"/>
+                </a:lnTo>
+                <a:lnTo>
+                  <a:pt x="436591" y="1504364"/>
+                </a:lnTo>
+                <a:lnTo>
+                  <a:pt x="476281" y="1481793"/>
+                </a:lnTo>
+                <a:lnTo>
+                  <a:pt x="515971" y="1458645"/>
+                </a:lnTo>
+                <a:lnTo>
+                  <a:pt x="555662" y="1435075"/>
+                </a:lnTo>
+                <a:lnTo>
+                  <a:pt x="595352" y="1411219"/>
+                </a:lnTo>
+                <a:lnTo>
+                  <a:pt x="635042" y="1387188"/>
+                </a:lnTo>
+                <a:lnTo>
+                  <a:pt x="674732" y="1363081"/>
+                </a:lnTo>
+                <a:lnTo>
+                  <a:pt x="714422" y="1338976"/>
+                </a:lnTo>
+                <a:lnTo>
+                  <a:pt x="754112" y="1314942"/>
+                </a:lnTo>
+                <a:lnTo>
+                  <a:pt x="793803" y="1291034"/>
+                </a:lnTo>
+                <a:lnTo>
+                  <a:pt x="833493" y="1267297"/>
+                </a:lnTo>
+                <a:lnTo>
+                  <a:pt x="873183" y="1243769"/>
+                </a:lnTo>
+                <a:lnTo>
+                  <a:pt x="912873" y="1220479"/>
+                </a:lnTo>
+                <a:lnTo>
+                  <a:pt x="952563" y="1197450"/>
+                </a:lnTo>
+                <a:lnTo>
+                  <a:pt x="992253" y="1174702"/>
+                </a:lnTo>
+                <a:lnTo>
+                  <a:pt x="1031943" y="1152249"/>
+                </a:lnTo>
+                <a:lnTo>
+                  <a:pt x="1071634" y="1130102"/>
+                </a:lnTo>
+                <a:lnTo>
+                  <a:pt x="1111324" y="1108269"/>
+                </a:lnTo>
+                <a:lnTo>
+                  <a:pt x="1151014" y="1086755"/>
+                </a:lnTo>
+                <a:lnTo>
+                  <a:pt x="1190704" y="1065564"/>
+                </a:lnTo>
+                <a:lnTo>
+                  <a:pt x="1230394" y="1044697"/>
+                </a:lnTo>
+                <a:lnTo>
+                  <a:pt x="1270084" y="1024155"/>
+                </a:lnTo>
+                <a:lnTo>
+                  <a:pt x="1309774" y="1003938"/>
+                </a:lnTo>
+                <a:lnTo>
+                  <a:pt x="1349465" y="984043"/>
+                </a:lnTo>
+                <a:lnTo>
+                  <a:pt x="1389155" y="964468"/>
+                </a:lnTo>
+                <a:lnTo>
+                  <a:pt x="1428845" y="945209"/>
+                </a:lnTo>
+                <a:lnTo>
+                  <a:pt x="1468535" y="926265"/>
+                </a:lnTo>
+                <a:lnTo>
+                  <a:pt x="1508225" y="907630"/>
+                </a:lnTo>
+                <a:lnTo>
+                  <a:pt x="1547915" y="889300"/>
+                </a:lnTo>
+                <a:lnTo>
+                  <a:pt x="1587606" y="871271"/>
+                </a:lnTo>
+                <a:lnTo>
+                  <a:pt x="1627296" y="853538"/>
+                </a:lnTo>
+                <a:lnTo>
+                  <a:pt x="1666986" y="836097"/>
+                </a:lnTo>
+                <a:lnTo>
+                  <a:pt x="1706676" y="818942"/>
+                </a:lnTo>
+                <a:lnTo>
+                  <a:pt x="1746366" y="802069"/>
+                </a:lnTo>
+                <a:lnTo>
+                  <a:pt x="1786056" y="785474"/>
+                </a:lnTo>
+                <a:lnTo>
+                  <a:pt x="1825746" y="769151"/>
+                </a:lnTo>
+                <a:lnTo>
+                  <a:pt x="1865437" y="753095"/>
+                </a:lnTo>
+                <a:lnTo>
+                  <a:pt x="1905127" y="737302"/>
+                </a:lnTo>
+                <a:lnTo>
+                  <a:pt x="1944817" y="721767"/>
+                </a:lnTo>
+                <a:lnTo>
+                  <a:pt x="1984507" y="706486"/>
+                </a:lnTo>
+                <a:lnTo>
+                  <a:pt x="2024197" y="691453"/>
+                </a:lnTo>
+                <a:lnTo>
+                  <a:pt x="2063887" y="676665"/>
+                </a:lnTo>
+                <a:lnTo>
+                  <a:pt x="2103577" y="662117"/>
+                </a:lnTo>
+                <a:lnTo>
+                  <a:pt x="2143268" y="647805"/>
+                </a:lnTo>
+                <a:lnTo>
+                  <a:pt x="2182958" y="633724"/>
+                </a:lnTo>
+                <a:lnTo>
+                  <a:pt x="2222648" y="619872"/>
+                </a:lnTo>
+                <a:lnTo>
+                  <a:pt x="2262338" y="606242"/>
+                </a:lnTo>
+                <a:lnTo>
+                  <a:pt x="2302028" y="592833"/>
+                </a:lnTo>
+                <a:lnTo>
+                  <a:pt x="2341718" y="579640"/>
+                </a:lnTo>
+                <a:lnTo>
+                  <a:pt x="2381409" y="566658"/>
+                </a:lnTo>
+                <a:lnTo>
+                  <a:pt x="2421099" y="553886"/>
+                </a:lnTo>
+                <a:lnTo>
+                  <a:pt x="2460789" y="541319"/>
+                </a:lnTo>
+                <a:lnTo>
+                  <a:pt x="2500479" y="528954"/>
+                </a:lnTo>
+                <a:lnTo>
+                  <a:pt x="2540169" y="516787"/>
+                </a:lnTo>
+                <a:lnTo>
+                  <a:pt x="2579859" y="504815"/>
+                </a:lnTo>
+                <a:lnTo>
+                  <a:pt x="2619549" y="493036"/>
+                </a:lnTo>
+                <a:lnTo>
+                  <a:pt x="2659240" y="481446"/>
+                </a:lnTo>
+                <a:lnTo>
+                  <a:pt x="2698930" y="470043"/>
+                </a:lnTo>
+                <a:lnTo>
+                  <a:pt x="2738620" y="458822"/>
+                </a:lnTo>
+                <a:lnTo>
+                  <a:pt x="2778310" y="447782"/>
+                </a:lnTo>
+                <a:lnTo>
+                  <a:pt x="2818000" y="436921"/>
+                </a:lnTo>
+                <a:lnTo>
+                  <a:pt x="2857690" y="426234"/>
+                </a:lnTo>
+                <a:lnTo>
+                  <a:pt x="2897380" y="415720"/>
+                </a:lnTo>
+                <a:lnTo>
+                  <a:pt x="2937071" y="405376"/>
+                </a:lnTo>
+                <a:lnTo>
+                  <a:pt x="2976761" y="395200"/>
+                </a:lnTo>
+                <a:lnTo>
+                  <a:pt x="3016451" y="385189"/>
+                </a:lnTo>
+                <a:lnTo>
+                  <a:pt x="3056141" y="375342"/>
+                </a:lnTo>
+                <a:lnTo>
+                  <a:pt x="3095831" y="365655"/>
+                </a:lnTo>
+                <a:lnTo>
+                  <a:pt x="3135521" y="356128"/>
+                </a:lnTo>
+                <a:lnTo>
+                  <a:pt x="3175212" y="346756"/>
+                </a:lnTo>
+                <a:lnTo>
+                  <a:pt x="3214902" y="337540"/>
+                </a:lnTo>
+                <a:lnTo>
+                  <a:pt x="3254592" y="328476"/>
+                </a:lnTo>
+                <a:lnTo>
+                  <a:pt x="3294282" y="319562"/>
+                </a:lnTo>
+                <a:lnTo>
+                  <a:pt x="3333972" y="310798"/>
+                </a:lnTo>
+                <a:lnTo>
+                  <a:pt x="3373662" y="302180"/>
+                </a:lnTo>
+                <a:lnTo>
+                  <a:pt x="3413352" y="293708"/>
+                </a:lnTo>
+                <a:lnTo>
+                  <a:pt x="3453043" y="285379"/>
+                </a:lnTo>
+                <a:lnTo>
+                  <a:pt x="3492733" y="277192"/>
+                </a:lnTo>
+                <a:lnTo>
+                  <a:pt x="3532423" y="269145"/>
+                </a:lnTo>
+                <a:lnTo>
+                  <a:pt x="3572113" y="261237"/>
+                </a:lnTo>
+                <a:lnTo>
+                  <a:pt x="3611803" y="253466"/>
+                </a:lnTo>
+                <a:lnTo>
+                  <a:pt x="3651493" y="245830"/>
+                </a:lnTo>
+                <a:lnTo>
+                  <a:pt x="3691183" y="238328"/>
+                </a:lnTo>
+                <a:lnTo>
+                  <a:pt x="3730874" y="230959"/>
+                </a:lnTo>
+                <a:lnTo>
+                  <a:pt x="3770564" y="223721"/>
+                </a:lnTo>
+                <a:lnTo>
+                  <a:pt x="3810254" y="216613"/>
+                </a:lnTo>
+                <a:lnTo>
+                  <a:pt x="3849944" y="209634"/>
+                </a:lnTo>
+                <a:lnTo>
+                  <a:pt x="3889634" y="202782"/>
+                </a:lnTo>
+                <a:lnTo>
+                  <a:pt x="3929324" y="196056"/>
+                </a:lnTo>
+                <a:lnTo>
+                  <a:pt x="3969015" y="189455"/>
+                </a:lnTo>
+                <a:lnTo>
+                  <a:pt x="4008705" y="182977"/>
+                </a:lnTo>
+                <a:lnTo>
+                  <a:pt x="4048395" y="176623"/>
+                </a:lnTo>
+                <a:lnTo>
+                  <a:pt x="4088085" y="170389"/>
+                </a:lnTo>
+                <a:lnTo>
+                  <a:pt x="4127775" y="164276"/>
+                </a:lnTo>
+                <a:lnTo>
+                  <a:pt x="4167465" y="158283"/>
+                </a:lnTo>
+                <a:lnTo>
+                  <a:pt x="4207155" y="152407"/>
+                </a:lnTo>
+                <a:lnTo>
+                  <a:pt x="4246846" y="146649"/>
+                </a:lnTo>
+                <a:lnTo>
+                  <a:pt x="4286536" y="141008"/>
+                </a:lnTo>
+                <a:lnTo>
+                  <a:pt x="4326226" y="135482"/>
+                </a:lnTo>
+                <a:lnTo>
+                  <a:pt x="4365916" y="130070"/>
+                </a:lnTo>
+                <a:lnTo>
+                  <a:pt x="4405606" y="124772"/>
+                </a:lnTo>
+                <a:lnTo>
+                  <a:pt x="4445296" y="119586"/>
+                </a:lnTo>
+                <a:lnTo>
+                  <a:pt x="4484986" y="114513"/>
+                </a:lnTo>
+                <a:lnTo>
+                  <a:pt x="4524677" y="109550"/>
+                </a:lnTo>
+                <a:lnTo>
+                  <a:pt x="4564367" y="104698"/>
+                </a:lnTo>
+                <a:lnTo>
+                  <a:pt x="4604057" y="99956"/>
+                </a:lnTo>
+                <a:lnTo>
+                  <a:pt x="4643747" y="95322"/>
+                </a:lnTo>
+                <a:lnTo>
+                  <a:pt x="4683437" y="90796"/>
+                </a:lnTo>
+                <a:lnTo>
+                  <a:pt x="4723127" y="86378"/>
+                </a:lnTo>
+                <a:lnTo>
+                  <a:pt x="4762818" y="82066"/>
+                </a:lnTo>
+                <a:lnTo>
+                  <a:pt x="4802508" y="77861"/>
+                </a:lnTo>
+                <a:lnTo>
+                  <a:pt x="4842198" y="73760"/>
+                </a:lnTo>
+                <a:lnTo>
+                  <a:pt x="4881888" y="69765"/>
+                </a:lnTo>
+                <a:lnTo>
+                  <a:pt x="4921578" y="65873"/>
+                </a:lnTo>
+                <a:lnTo>
+                  <a:pt x="4961268" y="62085"/>
+                </a:lnTo>
+                <a:lnTo>
+                  <a:pt x="5000958" y="58400"/>
+                </a:lnTo>
+                <a:lnTo>
+                  <a:pt x="5040649" y="54818"/>
+                </a:lnTo>
+                <a:lnTo>
+                  <a:pt x="5080339" y="51337"/>
+                </a:lnTo>
+                <a:lnTo>
+                  <a:pt x="5120029" y="47958"/>
+                </a:lnTo>
+                <a:lnTo>
+                  <a:pt x="5159719" y="44680"/>
+                </a:lnTo>
+                <a:lnTo>
+                  <a:pt x="5199409" y="41502"/>
+                </a:lnTo>
+                <a:lnTo>
+                  <a:pt x="5239099" y="38424"/>
+                </a:lnTo>
+                <a:lnTo>
+                  <a:pt x="5278789" y="35445"/>
+                </a:lnTo>
+                <a:lnTo>
+                  <a:pt x="5318480" y="32566"/>
+                </a:lnTo>
+                <a:lnTo>
+                  <a:pt x="5358170" y="29785"/>
+                </a:lnTo>
+                <a:lnTo>
+                  <a:pt x="5397860" y="27103"/>
+                </a:lnTo>
+                <a:lnTo>
+                  <a:pt x="5437550" y="24518"/>
+                </a:lnTo>
+                <a:lnTo>
+                  <a:pt x="5477240" y="22031"/>
+                </a:lnTo>
+                <a:lnTo>
+                  <a:pt x="5516930" y="19641"/>
+                </a:lnTo>
+                <a:lnTo>
+                  <a:pt x="5556621" y="17348"/>
+                </a:lnTo>
+                <a:lnTo>
+                  <a:pt x="5596311" y="15151"/>
+                </a:lnTo>
+                <a:lnTo>
+                  <a:pt x="5636001" y="13050"/>
+                </a:lnTo>
+                <a:lnTo>
+                  <a:pt x="5675691" y="11045"/>
+                </a:lnTo>
+                <a:lnTo>
+                  <a:pt x="5715381" y="9136"/>
+                </a:lnTo>
+                <a:lnTo>
+                  <a:pt x="5755071" y="7322"/>
+                </a:lnTo>
+                <a:lnTo>
+                  <a:pt x="5794761" y="5603"/>
+                </a:lnTo>
+                <a:lnTo>
+                  <a:pt x="5834452" y="3979"/>
+                </a:lnTo>
+                <a:lnTo>
+                  <a:pt x="5874142" y="2450"/>
+                </a:lnTo>
+                <a:lnTo>
+                  <a:pt x="5913832" y="1014"/>
+                </a:lnTo>
+                <a:lnTo>
+                  <a:pt x="5943600" y="0"/>
+                </a:lnTo>
+              </a:path>
+            </a:pathLst>
+          </a:custGeom>
+          <a:noFill/>
+          <a:ln w="38100">
+            <a:solidFill>
+              <a:srgbClr val="F28BA0"/>
+            </a:solidFill>
+          </a:ln>
+          <a:effectLst/>
+        </p:spPr>
+        <p:txBody>
+          <a:bodyPr rtlCol="0" anchor="ctr"/>
+          <a:lstStyle/>
+          <a:p>
+            <a:pPr algn="ctr"/>
+          </a:p>
+        </p:txBody>
+      </p:sp>
+      <p:sp>
+        <p:nvSpPr>
+          <p:cNvPr id="32" name="C3-E05 rect 30" descr="sci-ppt:o030"/>
+          <p:cNvSpPr/>
+          <p:nvPr/>
+        </p:nvSpPr>
+        <p:spPr>
+          <a:xfrm>
+            <a:off x="1188720" y="1481328"/>
+            <a:ext cx="274320" cy="182880"/>
+          </a:xfrm>
+          <a:prstGeom prst="rect">
+            <a:avLst/>
+          </a:prstGeom>
+          <a:solidFill>
+            <a:srgbClr val="8EDBD4"/>
+          </a:solidFill>
+          <a:ln w="12700">
+            <a:solidFill>
+              <a:srgbClr val="8EDBD4"/>
+            </a:solidFill>
+          </a:ln>
+          <a:effectLst/>
+        </p:spPr>
+        <p:txBody>
+          <a:bodyPr rtlCol="0" anchor="ctr"/>
+          <a:lstStyle/>
+          <a:p>
+            <a:pPr algn="ctr"/>
+          </a:p>
+        </p:txBody>
+      </p:sp>
+      <p:sp>
+        <p:nvSpPr>
+          <p:cNvPr id="33" name="C3-E05 text 31" descr="sci-ppt:o031"/>
           <p:cNvSpPr txBox="1"/>
           <p:nvPr/>
         </p:nvSpPr>
         <p:spPr>
           <a:xfrm>
-            <a:off x="8138160" y="1874519"/>
-            <a:ext cx="1554480" cy="365760"/>
+            <a:off x="1572768" y="1435608"/>
+            <a:ext cx="3840480" cy="231648"/>
           </a:xfrm>
           <a:prstGeom prst="rect">
             <a:avLst/>
@@ -3258,7 +5393,7 @@
           <a:effectLst/>
         </p:spPr>
         <p:txBody>
-          <a:bodyPr wrap="square" lIns="27432" rIns="27432" tIns="18288" bIns="18288" anchor="ctr">
+          <a:bodyPr wrap="none" lIns="18288" rIns="18288" tIns="18288" bIns="18288" anchor="t">
             <a:spAutoFit/>
           </a:bodyPr>
           <a:lstStyle/>
@@ -3269,49 +5404,283 @@
               </a:spcAft>
             </a:pPr>
             <a:r>
-              <a:rPr sz="1700" b="0" i="0">
+              <a:rPr sz="1200" b="0" i="0">
+                <a:solidFill>
+                  <a:srgbClr val="8EDBD4"/>
+                </a:solidFill>
+                <a:latin typeface="Arial"/>
+              </a:rPr>
+              <a:t>isolated bubble</a:t>
+            </a:r>
+          </a:p>
+        </p:txBody>
+      </p:sp>
+      <p:sp>
+        <p:nvSpPr>
+          <p:cNvPr id="34" name="C3-E05 rect 32" descr="sci-ppt:o032"/>
+          <p:cNvSpPr/>
+          <p:nvPr/>
+        </p:nvSpPr>
+        <p:spPr>
+          <a:xfrm>
+            <a:off x="1188720" y="1810512"/>
+            <a:ext cx="274320" cy="182880"/>
+          </a:xfrm>
+          <a:prstGeom prst="rect">
+            <a:avLst/>
+          </a:prstGeom>
+          <a:solidFill>
+            <a:srgbClr val="F2B880"/>
+          </a:solidFill>
+          <a:ln w="12700">
+            <a:solidFill>
+              <a:srgbClr val="F2B880"/>
+            </a:solidFill>
+          </a:ln>
+          <a:effectLst/>
+        </p:spPr>
+        <p:txBody>
+          <a:bodyPr rtlCol="0" anchor="ctr"/>
+          <a:lstStyle/>
+          <a:p>
+            <a:pPr algn="ctr"/>
+          </a:p>
+        </p:txBody>
+      </p:sp>
+      <p:sp>
+        <p:nvSpPr>
+          <p:cNvPr id="35" name="C3-E05 text 33" descr="sci-ppt:o033"/>
+          <p:cNvSpPr txBox="1"/>
+          <p:nvPr/>
+        </p:nvSpPr>
+        <p:spPr>
+          <a:xfrm>
+            <a:off x="1572768" y="1764792"/>
+            <a:ext cx="3840480" cy="231648"/>
+          </a:xfrm>
+          <a:prstGeom prst="rect">
+            <a:avLst/>
+          </a:prstGeom>
+          <a:noFill/>
+          <a:effectLst/>
+        </p:spPr>
+        <p:txBody>
+          <a:bodyPr wrap="none" lIns="18288" rIns="18288" tIns="18288" bIns="18288" anchor="t">
+            <a:spAutoFit/>
+          </a:bodyPr>
+          <a:lstStyle/>
+          <a:p>
+            <a:pPr algn="l">
+              <a:spcAft>
+                <a:spcPts val="0"/>
+              </a:spcAft>
+            </a:pPr>
+            <a:r>
+              <a:rPr sz="1200" b="0" i="0">
+                <a:solidFill>
+                  <a:srgbClr val="F2B880"/>
+                </a:solidFill>
+                <a:latin typeface="Arial"/>
+              </a:rPr>
+              <a:t>identical neighbour, d = 30 µm</a:t>
+            </a:r>
+          </a:p>
+        </p:txBody>
+      </p:sp>
+      <p:sp>
+        <p:nvSpPr>
+          <p:cNvPr id="36" name="C3-E05 rect 34" descr="sci-ppt:o034"/>
+          <p:cNvSpPr/>
+          <p:nvPr/>
+        </p:nvSpPr>
+        <p:spPr>
+          <a:xfrm>
+            <a:off x="1188720" y="2139696"/>
+            <a:ext cx="274320" cy="182880"/>
+          </a:xfrm>
+          <a:prstGeom prst="rect">
+            <a:avLst/>
+          </a:prstGeom>
+          <a:solidFill>
+            <a:srgbClr val="F28BA0"/>
+          </a:solidFill>
+          <a:ln w="12700">
+            <a:solidFill>
+              <a:srgbClr val="F28BA0"/>
+            </a:solidFill>
+          </a:ln>
+          <a:effectLst/>
+        </p:spPr>
+        <p:txBody>
+          <a:bodyPr rtlCol="0" anchor="ctr"/>
+          <a:lstStyle/>
+          <a:p>
+            <a:pPr algn="ctr"/>
+          </a:p>
+        </p:txBody>
+      </p:sp>
+      <p:sp>
+        <p:nvSpPr>
+          <p:cNvPr id="37" name="C3-E05 text 35" descr="sci-ppt:o035"/>
+          <p:cNvSpPr txBox="1"/>
+          <p:nvPr/>
+        </p:nvSpPr>
+        <p:spPr>
+          <a:xfrm>
+            <a:off x="1572768" y="2093976"/>
+            <a:ext cx="3840480" cy="231648"/>
+          </a:xfrm>
+          <a:prstGeom prst="rect">
+            <a:avLst/>
+          </a:prstGeom>
+          <a:noFill/>
+          <a:effectLst/>
+        </p:spPr>
+        <p:txBody>
+          <a:bodyPr wrap="none" lIns="18288" rIns="18288" tIns="18288" bIns="18288" anchor="t">
+            <a:spAutoFit/>
+          </a:bodyPr>
+          <a:lstStyle/>
+          <a:p>
+            <a:pPr algn="l">
+              <a:spcAft>
+                <a:spcPts val="0"/>
+              </a:spcAft>
+            </a:pPr>
+            <a:r>
+              <a:rPr sz="1200" b="0" i="0">
+                <a:solidFill>
+                  <a:srgbClr val="F28BA0"/>
+                </a:solidFill>
+                <a:latin typeface="Arial"/>
+              </a:rPr>
+              <a:t>identical neighbour, d = 15 µm</a:t>
+            </a:r>
+          </a:p>
+        </p:txBody>
+      </p:sp>
+      <p:sp>
+        <p:nvSpPr>
+          <p:cNvPr id="38" name="C3-E05 round_rect 36" descr="sci-ppt:o036"/>
+          <p:cNvSpPr/>
+          <p:nvPr/>
+        </p:nvSpPr>
+        <p:spPr>
+          <a:xfrm>
+            <a:off x="7132320" y="1371600"/>
+            <a:ext cx="4709160" cy="3657600"/>
+          </a:xfrm>
+          <a:prstGeom prst="roundRect">
+            <a:avLst/>
+          </a:prstGeom>
+          <a:solidFill>
+            <a:srgbClr val="213E4B"/>
+          </a:solidFill>
+          <a:ln w="20320">
+            <a:solidFill>
+              <a:srgbClr val="8EDBD4"/>
+            </a:solidFill>
+          </a:ln>
+          <a:effectLst/>
+        </p:spPr>
+        <p:txBody>
+          <a:bodyPr rtlCol="0" anchor="ctr"/>
+          <a:lstStyle/>
+          <a:p>
+            <a:pPr algn="ctr"/>
+          </a:p>
+        </p:txBody>
+      </p:sp>
+      <p:sp>
+        <p:nvSpPr>
+          <p:cNvPr id="39" name="C3-E05 text 37" descr="sci-ppt:o037"/>
+          <p:cNvSpPr txBox="1"/>
+          <p:nvPr/>
+        </p:nvSpPr>
+        <p:spPr>
+          <a:xfrm>
+            <a:off x="7242048" y="1426464"/>
+            <a:ext cx="4489704" cy="254889"/>
+          </a:xfrm>
+          <a:prstGeom prst="rect">
+            <a:avLst/>
+          </a:prstGeom>
+          <a:noFill/>
+          <a:effectLst/>
+        </p:spPr>
+        <p:txBody>
+          <a:bodyPr wrap="none" lIns="18288" rIns="18288" tIns="18288" bIns="18288" anchor="t">
+            <a:spAutoFit/>
+          </a:bodyPr>
+          <a:lstStyle/>
+          <a:p>
+            <a:pPr algn="l">
+              <a:spcAft>
+                <a:spcPts val="0"/>
+              </a:spcAft>
+            </a:pPr>
+            <a:r>
+              <a:rPr sz="1350" b="1" i="0">
+                <a:solidFill>
+                  <a:srgbClr val="8EDBD4"/>
+                </a:solidFill>
+                <a:latin typeface="Arial"/>
+              </a:rPr>
+              <a:t>Same equation, extra inertia</a:t>
+            </a:r>
+          </a:p>
+        </p:txBody>
+      </p:sp>
+      <p:sp>
+        <p:nvSpPr>
+          <p:cNvPr id="40" name="C3-E05 text 38" descr="sci-ppt:o038"/>
+          <p:cNvSpPr txBox="1"/>
+          <p:nvPr/>
+        </p:nvSpPr>
+        <p:spPr>
+          <a:xfrm>
+            <a:off x="7269480" y="1828800"/>
+            <a:ext cx="4480560" cy="231648"/>
+          </a:xfrm>
+          <a:prstGeom prst="rect">
+            <a:avLst/>
+          </a:prstGeom>
+          <a:noFill/>
+          <a:effectLst/>
+        </p:spPr>
+        <p:txBody>
+          <a:bodyPr wrap="none" lIns="18288" rIns="18288" tIns="18288" bIns="18288" anchor="t">
+            <a:spAutoFit/>
+          </a:bodyPr>
+          <a:lstStyle/>
+          <a:p>
+            <a:pPr algn="l">
+              <a:spcAft>
+                <a:spcPts val="0"/>
+              </a:spcAft>
+            </a:pPr>
+            <a:r>
+              <a:rPr sz="1200" b="1" i="0">
                 <a:solidFill>
                   <a:srgbClr val="E7F0F3"/>
                 </a:solidFill>
                 <a:latin typeface="Arial"/>
               </a:rPr>
-              <a:t>i: receiver</a:t>
-            </a:r>
-          </a:p>
-        </p:txBody>
-      </p:sp>
-      <p:cxnSp>
-        <p:nvCxnSpPr>
-          <p:cNvPr id="7" name="C3-E05 line 5" descr="sci-ppt:o005"/>
-          <p:cNvCxnSpPr/>
-          <p:nvPr/>
-        </p:nvCxnSpPr>
-        <p:spPr>
-          <a:xfrm>
-            <a:off x="2194560" y="3108960"/>
-            <a:ext cx="6492240" cy="0"/>
-          </a:xfrm>
-          <a:prstGeom prst="line">
-            <a:avLst/>
-          </a:prstGeom>
-          <a:ln w="25400">
-            <a:solidFill>
-              <a:srgbClr val="8EDBD4"/>
-            </a:solidFill>
-          </a:ln>
-          <a:effectLst/>
-        </p:spPr>
-      </p:cxnSp>
-      <p:sp>
-        <p:nvSpPr>
-          <p:cNvPr id="8" name="C3-E05 text 6" descr="sci-ppt:o006"/>
+              <a:t>R_iR̈ᵢ + (3/2)Ṙᵢ² + Σ (Rⱼ²R̈ⱼ + 2RⱼṘⱼ²)/dᵢⱼ = Bᵢ</a:t>
+            </a:r>
+          </a:p>
+        </p:txBody>
+      </p:sp>
+      <p:sp>
+        <p:nvSpPr>
+          <p:cNvPr id="41" name="C3-E05 text 39" descr="sci-ppt:o039"/>
           <p:cNvSpPr txBox="1"/>
           <p:nvPr/>
         </p:nvSpPr>
         <p:spPr>
           <a:xfrm>
-            <a:off x="4846320" y="3200400"/>
-            <a:ext cx="1828800" cy="365760"/>
+            <a:off x="7269480" y="2606040"/>
+            <a:ext cx="4480560" cy="402081"/>
           </a:xfrm>
           <a:prstGeom prst="rect">
             <a:avLst/>
@@ -3320,229 +5689,7 @@
           <a:effectLst/>
         </p:spPr>
         <p:txBody>
-          <a:bodyPr wrap="square" lIns="27432" rIns="27432" tIns="18288" bIns="18288" anchor="ctr">
-            <a:spAutoFit/>
-          </a:bodyPr>
-          <a:lstStyle/>
-          <a:p>
-            <a:pPr algn="l">
-              <a:spcAft>
-                <a:spcPts val="0"/>
-              </a:spcAft>
-            </a:pPr>
-            <a:r>
-              <a:rPr sz="1700" b="0" i="0">
-                <a:solidFill>
-                  <a:srgbClr val="E7F0F3"/>
-                </a:solidFill>
-                <a:latin typeface="Arial"/>
-              </a:rPr>
-              <a:t>d_ij</a:t>
-            </a:r>
-          </a:p>
-        </p:txBody>
-      </p:sp>
-      <p:cxnSp>
-        <p:nvCxnSpPr>
-          <p:cNvPr id="9" name="C3-E05 arrow 7" descr="sci-ppt:o007"/>
-          <p:cNvCxnSpPr/>
-          <p:nvPr/>
-        </p:nvCxnSpPr>
-        <p:spPr>
-          <a:xfrm>
-            <a:off x="3108960" y="2057400"/>
-            <a:ext cx="4617719" cy="0"/>
-          </a:xfrm>
-          <a:prstGeom prst="line">
-            <a:avLst/>
-          </a:prstGeom>
-          <a:ln w="25400">
-            <a:solidFill>
-              <a:srgbClr val="8EDBD4"/>
-            </a:solidFill>
-            <a:headEnd type="none" w="med" len="med"/>
-            <a:tailEnd type="triangle" w="med" len="med"/>
-          </a:ln>
-          <a:effectLst/>
-        </p:spPr>
-      </p:cxnSp>
-      <p:sp>
-        <p:nvSpPr>
-          <p:cNvPr id="10" name="C3-E05 text 8" descr="sci-ppt:o008"/>
-          <p:cNvSpPr txBox="1"/>
-          <p:nvPr/>
-        </p:nvSpPr>
-        <p:spPr>
-          <a:xfrm>
-            <a:off x="3749039" y="1600200"/>
-            <a:ext cx="3931920" cy="365760"/>
-          </a:xfrm>
-          <a:prstGeom prst="rect">
-            <a:avLst/>
-          </a:prstGeom>
-          <a:noFill/>
-          <a:effectLst/>
-        </p:spPr>
-        <p:txBody>
-          <a:bodyPr wrap="square" lIns="27432" rIns="27432" tIns="18288" bIns="18288" anchor="ctr">
-            <a:spAutoFit/>
-          </a:bodyPr>
-          <a:lstStyle/>
-          <a:p>
-            <a:pPr algn="l">
-              <a:spcAft>
-                <a:spcPts val="0"/>
-              </a:spcAft>
-            </a:pPr>
-            <a:r>
-              <a:rPr sz="1800" b="0" i="0">
-                <a:solidFill>
-                  <a:srgbClr val="E7F0F3"/>
-                </a:solidFill>
-                <a:latin typeface="Arial"/>
-              </a:rPr>
-              <a:t>Shared liquid: ρ, p∞</a:t>
-            </a:r>
-          </a:p>
-        </p:txBody>
-      </p:sp>
-      <p:sp>
-        <p:nvSpPr>
-          <p:cNvPr id="11" name="C3-E05 text 9" descr="sci-ppt:o009"/>
-          <p:cNvSpPr txBox="1"/>
-          <p:nvPr/>
-        </p:nvSpPr>
-        <p:spPr>
-          <a:xfrm>
-            <a:off x="548640" y="777240"/>
-            <a:ext cx="10972800" cy="411480"/>
-          </a:xfrm>
-          <a:prstGeom prst="rect">
-            <a:avLst/>
-          </a:prstGeom>
-          <a:noFill/>
-          <a:effectLst/>
-        </p:spPr>
-        <p:txBody>
-          <a:bodyPr wrap="square" lIns="27432" rIns="27432" tIns="18288" bIns="18288" anchor="ctr">
-            <a:spAutoFit/>
-          </a:bodyPr>
-          <a:lstStyle/>
-          <a:p>
-            <a:pPr algn="l">
-              <a:spcAft>
-                <a:spcPts val="0"/>
-              </a:spcAft>
-            </a:pPr>
-            <a:r>
-              <a:rPr sz="1800" b="0" i="0">
-                <a:solidFill>
-                  <a:srgbClr val="E7F0F3"/>
-                </a:solidFill>
-                <a:latin typeface="Arial"/>
-              </a:rPr>
-              <a:t>Fixed centres; spherical cavities; R_i, R_j ≪ d_ij</a:t>
-            </a:r>
-          </a:p>
-        </p:txBody>
-      </p:sp>
-      <p:sp>
-        <p:nvSpPr>
-          <p:cNvPr id="12" name="C3-E05 text 10" descr="sci-ppt:o010"/>
-          <p:cNvSpPr txBox="1"/>
-          <p:nvPr/>
-        </p:nvSpPr>
-        <p:spPr>
-          <a:xfrm>
-            <a:off x="3657600" y="2423160"/>
-            <a:ext cx="4206240" cy="548640"/>
-          </a:xfrm>
-          <a:prstGeom prst="rect">
-            <a:avLst/>
-          </a:prstGeom>
-          <a:noFill/>
-          <a:effectLst/>
-        </p:spPr>
-        <p:txBody>
-          <a:bodyPr wrap="square" lIns="27432" rIns="27432" tIns="18288" bIns="18288" anchor="ctr">
-            <a:spAutoFit/>
-          </a:bodyPr>
-          <a:lstStyle/>
-          <a:p>
-            <a:pPr algn="l">
-              <a:spcAft>
-                <a:spcPts val="0"/>
-              </a:spcAft>
-            </a:pPr>
-            <a:r>
-              <a:rPr sz="1700" b="0" i="0">
-                <a:solidFill>
-                  <a:srgbClr val="8EDBD4"/>
-                </a:solidFill>
-                <a:latin typeface="Arial"/>
-              </a:rPr>
-              <a:t>Source-volume acceleration</a:t>
-            </a:r>
-          </a:p>
-          <a:p>
-            <a:pPr algn="l">
-              <a:spcAft>
-                <a:spcPts val="0"/>
-              </a:spcAft>
-            </a:pPr>
-            <a:r>
-              <a:rPr sz="1700" b="0" i="0">
-                <a:solidFill>
-                  <a:srgbClr val="8EDBD4"/>
-                </a:solidFill>
-                <a:latin typeface="Arial"/>
-              </a:rPr>
-              <a:t>sets the pressure correction.</a:t>
-            </a:r>
-          </a:p>
-        </p:txBody>
-      </p:sp>
-      <p:cxnSp>
-        <p:nvCxnSpPr>
-          <p:cNvPr id="13" name="C3-E05 line 11" descr="sci-ppt:o011"/>
-          <p:cNvCxnSpPr/>
-          <p:nvPr/>
-        </p:nvCxnSpPr>
-        <p:spPr>
-          <a:xfrm>
-            <a:off x="274320" y="3977639"/>
-            <a:ext cx="11612880" cy="0"/>
-          </a:xfrm>
-          <a:prstGeom prst="line">
-            <a:avLst/>
-          </a:prstGeom>
-          <a:ln w="12700">
-            <a:solidFill>
-              <a:srgbClr val="405967"/>
-            </a:solidFill>
-          </a:ln>
-          <a:effectLst/>
-        </p:spPr>
-      </p:cxnSp>
-      <p:sp>
-        <p:nvSpPr>
-          <p:cNvPr id="14" name="C3-E05 text 12" descr="sci-ppt:o012"/>
-          <p:cNvSpPr txBox="1"/>
-          <p:nvPr/>
-        </p:nvSpPr>
-        <p:spPr>
-          <a:xfrm>
-            <a:off x="320040" y="4096512"/>
-            <a:ext cx="5715000" cy="246888"/>
-          </a:xfrm>
-          <a:prstGeom prst="rect">
-            <a:avLst/>
-          </a:prstGeom>
-          <a:noFill/>
-          <a:effectLst/>
-        </p:spPr>
-        <p:txBody>
-          <a:bodyPr wrap="square" lIns="27432" rIns="27432" tIns="18288" bIns="18288" anchor="ctr">
+          <a:bodyPr wrap="none" lIns="18288" rIns="18288" tIns="18288" bIns="18288" anchor="t">
             <a:spAutoFit/>
           </a:bodyPr>
           <a:lstStyle/>
@@ -3559,33 +5706,9 @@
                 </a:solidFill>
                 <a:latin typeface="Arial"/>
               </a:rPr>
-              <a:t>• R_i, Ṙ_i, R̈_i at receiver i</a:t>
-            </a:r>
-          </a:p>
-        </p:txBody>
-      </p:sp>
-      <p:sp>
-        <p:nvSpPr>
-          <p:cNvPr id="15" name="C3-E05 text 13" descr="sci-ppt:o013"/>
-          <p:cNvSpPr txBox="1"/>
-          <p:nvPr/>
-        </p:nvSpPr>
-        <p:spPr>
-          <a:xfrm>
-            <a:off x="6217920" y="4096512"/>
-            <a:ext cx="5715000" cy="246888"/>
-          </a:xfrm>
-          <a:prstGeom prst="rect">
-            <a:avLst/>
-          </a:prstGeom>
-          <a:noFill/>
-          <a:effectLst/>
-        </p:spPr>
-        <p:txBody>
-          <a:bodyPr wrap="square" lIns="27432" rIns="27432" tIns="18288" bIns="18288" anchor="ctr">
-            <a:spAutoFit/>
-          </a:bodyPr>
-          <a:lstStyle/>
+              <a:t>Bᵢ = [p_b,i − p∞ − 2σ_b/Rᵢ − 4μṘᵢ/Rᵢ] / ρ  (isolated</a:t>
+            </a:r>
+          </a:p>
           <a:p>
             <a:pPr algn="l">
               <a:spcAft>
@@ -3599,21 +5722,21 @@
                 </a:solidFill>
                 <a:latin typeface="Arial"/>
               </a:rPr>
-              <a:t>• R_j, Ṙ_j, R̈_j at source j</a:t>
-            </a:r>
-          </a:p>
-        </p:txBody>
-      </p:sp>
-      <p:sp>
-        <p:nvSpPr>
-          <p:cNvPr id="16" name="C3-E05 text 14" descr="sci-ppt:o014"/>
+              <a:t>driving)</a:t>
+            </a:r>
+          </a:p>
+        </p:txBody>
+      </p:sp>
+      <p:sp>
+        <p:nvSpPr>
+          <p:cNvPr id="42" name="C3-E05 text 40" descr="sci-ppt:o040"/>
           <p:cNvSpPr txBox="1"/>
           <p:nvPr/>
         </p:nvSpPr>
         <p:spPr>
           <a:xfrm>
-            <a:off x="320040" y="4329684"/>
-            <a:ext cx="5715000" cy="246888"/>
+            <a:off x="7470648" y="3291840"/>
+            <a:ext cx="4279392" cy="417576"/>
           </a:xfrm>
           <a:prstGeom prst="rect">
             <a:avLst/>
@@ -3622,7 +5745,7 @@
           <a:effectLst/>
         </p:spPr>
         <p:txBody>
-          <a:bodyPr wrap="square" lIns="27432" rIns="27432" tIns="18288" bIns="18288" anchor="ctr">
+          <a:bodyPr wrap="none" lIns="18288" rIns="18288" tIns="18288" bIns="18288" anchor="t">
             <a:spAutoFit/>
           </a:bodyPr>
           <a:lstStyle/>
@@ -3633,27 +5756,75 @@
               </a:spcAft>
             </a:pPr>
             <a:r>
-              <a:rPr sz="1150" b="0" i="0">
+              <a:rPr sz="1200" b="0" i="0">
                 <a:solidFill>
-                  <a:srgbClr val="B4C7D2"/>
+                  <a:srgbClr val="E7F0F3"/>
                 </a:solidFill>
                 <a:latin typeface="Arial"/>
               </a:rPr>
-              <a:t>• d_ij between centers</a:t>
-            </a:r>
-          </a:p>
-        </p:txBody>
-      </p:sp>
-      <p:sp>
-        <p:nvSpPr>
-          <p:cNvPr id="17" name="C3-E05 text 15" descr="sci-ppt:o015"/>
+              <a:t>Identical neighbours move together, so the extra</a:t>
+            </a:r>
+          </a:p>
+          <a:p>
+            <a:pPr algn="l">
+              <a:spcAft>
+                <a:spcPts val="0"/>
+              </a:spcAft>
+            </a:pPr>
+            <a:r>
+              <a:rPr sz="1200" b="0" i="0">
+                <a:solidFill>
+                  <a:srgbClr val="E7F0F3"/>
+                </a:solidFill>
+                <a:latin typeface="Arial"/>
+              </a:rPr>
+              <a:t>term acts as added liquid mass.</a:t>
+            </a:r>
+          </a:p>
+        </p:txBody>
+      </p:sp>
+      <p:sp>
+        <p:nvSpPr>
+          <p:cNvPr id="43" name="C3-E05 ellipse 41" descr="sci-ppt:o041"/>
+          <p:cNvSpPr/>
+          <p:nvPr/>
+        </p:nvSpPr>
+        <p:spPr>
+          <a:xfrm>
+            <a:off x="7301483" y="3345180"/>
+            <a:ext cx="82296" cy="82296"/>
+          </a:xfrm>
+          <a:prstGeom prst="ellipse">
+            <a:avLst/>
+          </a:prstGeom>
+          <a:solidFill>
+            <a:srgbClr val="8EDBD4"/>
+          </a:solidFill>
+          <a:ln w="12700">
+            <a:solidFill>
+              <a:srgbClr val="8EDBD4"/>
+            </a:solidFill>
+          </a:ln>
+          <a:effectLst/>
+        </p:spPr>
+        <p:txBody>
+          <a:bodyPr rtlCol="0" anchor="ctr"/>
+          <a:lstStyle/>
+          <a:p>
+            <a:pPr algn="ctr"/>
+          </a:p>
+        </p:txBody>
+      </p:sp>
+      <p:sp>
+        <p:nvSpPr>
+          <p:cNvPr id="44" name="C3-E05 text 42" descr="sci-ppt:o042"/>
           <p:cNvSpPr txBox="1"/>
           <p:nvPr/>
         </p:nvSpPr>
         <p:spPr>
           <a:xfrm>
-            <a:off x="6217920" y="4329684"/>
-            <a:ext cx="5715000" cy="246888"/>
+            <a:off x="7470648" y="3755136"/>
+            <a:ext cx="4279392" cy="231648"/>
           </a:xfrm>
           <a:prstGeom prst="rect">
             <a:avLst/>
@@ -3662,7 +5833,7 @@
           <a:effectLst/>
         </p:spPr>
         <p:txBody>
-          <a:bodyPr wrap="square" lIns="27432" rIns="27432" tIns="18288" bIns="18288" anchor="ctr">
+          <a:bodyPr wrap="none" lIns="18288" rIns="18288" tIns="18288" bIns="18288" anchor="t">
             <a:spAutoFit/>
           </a:bodyPr>
           <a:lstStyle/>
@@ -3673,27 +5844,59 @@
               </a:spcAft>
             </a:pPr>
             <a:r>
-              <a:rPr sz="1150" b="0" i="0">
+              <a:rPr sz="1200" b="0" i="0">
                 <a:solidFill>
-                  <a:srgbClr val="B4C7D2"/>
+                  <a:srgbClr val="E7F0F3"/>
                 </a:solidFill>
                 <a:latin typeface="Arial"/>
               </a:rPr>
-              <a:t>• p_b,i inside bubble</a:t>
-            </a:r>
-          </a:p>
-        </p:txBody>
-      </p:sp>
-      <p:sp>
-        <p:nvSpPr>
-          <p:cNvPr id="18" name="C3-E05 text 16" descr="sci-ppt:o016"/>
+              <a:t>The closer the neighbour, the slower the expansion.</a:t>
+            </a:r>
+          </a:p>
+        </p:txBody>
+      </p:sp>
+      <p:sp>
+        <p:nvSpPr>
+          <p:cNvPr id="45" name="C3-E05 ellipse 43" descr="sci-ppt:o043"/>
+          <p:cNvSpPr/>
+          <p:nvPr/>
+        </p:nvSpPr>
+        <p:spPr>
+          <a:xfrm>
+            <a:off x="7301483" y="3808476"/>
+            <a:ext cx="82296" cy="82296"/>
+          </a:xfrm>
+          <a:prstGeom prst="ellipse">
+            <a:avLst/>
+          </a:prstGeom>
+          <a:solidFill>
+            <a:srgbClr val="8EDBD4"/>
+          </a:solidFill>
+          <a:ln w="12700">
+            <a:solidFill>
+              <a:srgbClr val="8EDBD4"/>
+            </a:solidFill>
+          </a:ln>
+          <a:effectLst/>
+        </p:spPr>
+        <p:txBody>
+          <a:bodyPr rtlCol="0" anchor="ctr"/>
+          <a:lstStyle/>
+          <a:p>
+            <a:pPr algn="ctr"/>
+          </a:p>
+        </p:txBody>
+      </p:sp>
+      <p:sp>
+        <p:nvSpPr>
+          <p:cNvPr id="46" name="C3-E05 text 44" descr="sci-ppt:o044"/>
           <p:cNvSpPr txBox="1"/>
           <p:nvPr/>
         </p:nvSpPr>
         <p:spPr>
           <a:xfrm>
-            <a:off x="320040" y="4562856"/>
-            <a:ext cx="5715000" cy="246888"/>
+            <a:off x="7470648" y="4032503"/>
+            <a:ext cx="4279392" cy="231648"/>
           </a:xfrm>
           <a:prstGeom prst="rect">
             <a:avLst/>
@@ -3702,7 +5905,7 @@
           <a:effectLst/>
         </p:spPr>
         <p:txBody>
-          <a:bodyPr wrap="square" lIns="27432" rIns="27432" tIns="18288" bIns="18288" anchor="ctr">
+          <a:bodyPr wrap="none" lIns="18288" rIns="18288" tIns="18288" bIns="18288" anchor="t">
             <a:spAutoFit/>
           </a:bodyPr>
           <a:lstStyle/>
@@ -3713,27 +5916,59 @@
               </a:spcAft>
             </a:pPr>
             <a:r>
-              <a:rPr sz="1150" b="0" i="0">
+              <a:rPr sz="1200" b="0" i="0">
                 <a:solidFill>
-                  <a:srgbClr val="B4C7D2"/>
+                  <a:srgbClr val="E7F0F3"/>
                 </a:solidFill>
                 <a:latin typeface="Arial"/>
               </a:rPr>
-              <a:t>• p∞ remote liquid</a:t>
-            </a:r>
-          </a:p>
-        </p:txBody>
-      </p:sp>
-      <p:sp>
-        <p:nvSpPr>
-          <p:cNvPr id="19" name="C3-E05 text 17" descr="sci-ppt:o017"/>
+              <a:t>Energy is shared, not created.</a:t>
+            </a:r>
+          </a:p>
+        </p:txBody>
+      </p:sp>
+      <p:sp>
+        <p:nvSpPr>
+          <p:cNvPr id="47" name="C3-E05 ellipse 45" descr="sci-ppt:o045"/>
+          <p:cNvSpPr/>
+          <p:nvPr/>
+        </p:nvSpPr>
+        <p:spPr>
+          <a:xfrm>
+            <a:off x="7301483" y="4085843"/>
+            <a:ext cx="82296" cy="82296"/>
+          </a:xfrm>
+          <a:prstGeom prst="ellipse">
+            <a:avLst/>
+          </a:prstGeom>
+          <a:solidFill>
+            <a:srgbClr val="8EDBD4"/>
+          </a:solidFill>
+          <a:ln w="12700">
+            <a:solidFill>
+              <a:srgbClr val="8EDBD4"/>
+            </a:solidFill>
+          </a:ln>
+          <a:effectLst/>
+        </p:spPr>
+        <p:txBody>
+          <a:bodyPr rtlCol="0" anchor="ctr"/>
+          <a:lstStyle/>
+          <a:p>
+            <a:pPr algn="ctr"/>
+          </a:p>
+        </p:txBody>
+      </p:sp>
+      <p:sp>
+        <p:nvSpPr>
+          <p:cNvPr id="48" name="C3-E05 text 46" descr="sci-ppt:o046"/>
           <p:cNvSpPr txBox="1"/>
           <p:nvPr/>
         </p:nvSpPr>
         <p:spPr>
           <a:xfrm>
-            <a:off x="6217920" y="4562856"/>
-            <a:ext cx="5715000" cy="246888"/>
+            <a:off x="914400" y="5733288"/>
+            <a:ext cx="10972800" cy="239395"/>
           </a:xfrm>
           <a:prstGeom prst="rect">
             <a:avLst/>
@@ -3742,7 +5977,7 @@
           <a:effectLst/>
         </p:spPr>
         <p:txBody>
-          <a:bodyPr wrap="square" lIns="27432" rIns="27432" tIns="18288" bIns="18288" anchor="ctr">
+          <a:bodyPr wrap="none" lIns="18288" rIns="18288" tIns="18288" bIns="18288" anchor="t">
             <a:spAutoFit/>
           </a:bodyPr>
           <a:lstStyle/>
@@ -3753,27 +5988,27 @@
               </a:spcAft>
             </a:pPr>
             <a:r>
-              <a:rPr sz="1150" b="0" i="0">
+              <a:rPr sz="1250" b="0" i="0">
                 <a:solidFill>
-                  <a:srgbClr val="B4C7D2"/>
+                  <a:srgbClr val="E7F0F3"/>
                 </a:solidFill>
                 <a:latin typeface="Arial"/>
               </a:rPr>
-              <a:t>• B_i, σ_b, μ, ρ: radial balance legend</a:t>
-            </a:r>
-          </a:p>
-        </p:txBody>
-      </p:sp>
-      <p:sp>
-        <p:nvSpPr>
-          <p:cNvPr id="20" name="C3-E05 text 18" descr="sci-ppt:o018"/>
+              <a:t>Two identical bubbles (p_g0 = 1 MPa, γ = 1.4) integrated with the coupled equation of Eq. C3-E05.</a:t>
+            </a:r>
+          </a:p>
+        </p:txBody>
+      </p:sp>
+      <p:sp>
+        <p:nvSpPr>
+          <p:cNvPr id="49" name="C3-E05 text 47" descr="sci-ppt:o047"/>
           <p:cNvSpPr txBox="1"/>
           <p:nvPr/>
         </p:nvSpPr>
         <p:spPr>
           <a:xfrm>
-            <a:off x="320040" y="5596128"/>
-            <a:ext cx="11430000" cy="292608"/>
+            <a:off x="320040" y="6510528"/>
+            <a:ext cx="11521440" cy="200660"/>
           </a:xfrm>
           <a:prstGeom prst="rect">
             <a:avLst/>
@@ -3782,87 +6017,7 @@
           <a:effectLst/>
         </p:spPr>
         <p:txBody>
-          <a:bodyPr wrap="square" lIns="27432" rIns="27432" tIns="18288" bIns="18288" anchor="ctr">
-            <a:spAutoFit/>
-          </a:bodyPr>
-          <a:lstStyle/>
-          <a:p>
-            <a:pPr algn="l">
-              <a:spcAft>
-                <a:spcPts val="0"/>
-              </a:spcAft>
-            </a:pPr>
-            <a:r>
-              <a:rPr sz="1150" b="0" i="0">
-                <a:solidFill>
-                  <a:srgbClr val="8EDBD4"/>
-                </a:solidFill>
-                <a:latin typeface="Arial"/>
-              </a:rPr>
-              <a:t>All accelerations solved together</a:t>
-            </a:r>
-          </a:p>
-        </p:txBody>
-      </p:sp>
-      <p:sp>
-        <p:nvSpPr>
-          <p:cNvPr id="21" name="C3-E05 text 19" descr="sci-ppt:o019"/>
-          <p:cNvSpPr txBox="1"/>
-          <p:nvPr/>
-        </p:nvSpPr>
-        <p:spPr>
-          <a:xfrm>
-            <a:off x="320040" y="5870448"/>
-            <a:ext cx="11430000" cy="292608"/>
-          </a:xfrm>
-          <a:prstGeom prst="rect">
-            <a:avLst/>
-          </a:prstGeom>
-          <a:noFill/>
-          <a:effectLst/>
-        </p:spPr>
-        <p:txBody>
-          <a:bodyPr wrap="square" lIns="27432" rIns="27432" tIns="18288" bIns="18288" anchor="ctr">
-            <a:spAutoFit/>
-          </a:bodyPr>
-          <a:lstStyle/>
-          <a:p>
-            <a:pPr algn="l">
-              <a:spcAft>
-                <a:spcPts val="0"/>
-              </a:spcAft>
-            </a:pPr>
-            <a:r>
-              <a:rPr sz="1150" b="0" i="0">
-                <a:solidFill>
-                  <a:srgbClr val="8EDBD4"/>
-                </a:solidFill>
-                <a:latin typeface="Arial"/>
-              </a:rPr>
-              <a:t>No jet shape or film boundary is yet resolved</a:t>
-            </a:r>
-          </a:p>
-        </p:txBody>
-      </p:sp>
-      <p:sp>
-        <p:nvSpPr>
-          <p:cNvPr id="22" name="C3-E05 text 20" descr="sci-ppt:o020"/>
-          <p:cNvSpPr txBox="1"/>
-          <p:nvPr/>
-        </p:nvSpPr>
-        <p:spPr>
-          <a:xfrm>
-            <a:off x="320040" y="6473952"/>
-            <a:ext cx="11430000" cy="256032"/>
-          </a:xfrm>
-          <a:prstGeom prst="rect">
-            <a:avLst/>
-          </a:prstGeom>
-          <a:noFill/>
-          <a:effectLst/>
-        </p:spPr>
-        <p:txBody>
-          <a:bodyPr wrap="square" lIns="27432" rIns="27432" tIns="18288" bIns="18288" anchor="ctr">
+          <a:bodyPr wrap="none" lIns="18288" rIns="18288" tIns="18288" bIns="18288" anchor="t">
             <a:spAutoFit/>
           </a:bodyPr>
           <a:lstStyle/>
@@ -3879,7 +6034,7 @@
                 </a:solidFill>
                 <a:latin typeface="Arial"/>
               </a:rPr>
-              <a:t>Model schematic; geometry is not to scale.</a:t>
+              <a:t>Coupled spherical approximation of Eq. C3-E05 for N = 2 identical bubbles.</a:t>
             </a:r>
           </a:p>
         </p:txBody>
